--- a/static/ppts/G7_Math_Substitution.pptx
+++ b/static/ppts/G7_Math_Substitution.pptx
@@ -9,9 +9,13 @@
     <p:sldId id="257" r:id="rId3"/>
     <p:sldId id="258" r:id="rId4"/>
     <p:sldId id="259" r:id="rId5"/>
+    <p:sldId id="260" r:id="rId6"/>
+    <p:sldId id="261" r:id="rId7"/>
+    <p:sldId id="262" r:id="rId8"/>
+    <p:sldId id="263" r:id="rId9"/>
   </p:sldIdLst>
   <p:notesMasterIdLst>
-    <p:notesMasterId r:id="rId6"/>
+    <p:notesMasterId r:id="rId10"/>
   </p:notesMasterIdLst>
   <p:sldSz cx="9144000" cy="5143500"/>
   <p:notesSz cx="5143500" cy="9144000"/>
@@ -811,6 +815,358 @@
 </p:notes>
 </file>
 
+<file path=ppt/notesSlides/notesSlide5.xml><?xml version="1.0" encoding="utf-8"?>
+<p:notes xmlns:a="http://schemas.openxmlformats.org/drawingml/2006/main" xmlns:r="http://schemas.openxmlformats.org/officeDocument/2006/relationships" xmlns:p="http://schemas.openxmlformats.org/presentationml/2006/main">
+  <p:cSld>
+    <p:spTree>
+      <p:nvGrpSpPr>
+        <p:cNvPr id="1" name=""/>
+        <p:cNvGrpSpPr/>
+        <p:nvPr/>
+      </p:nvGrpSpPr>
+      <p:grpSpPr>
+        <a:xfrm>
+          <a:off x="0" y="0"/>
+          <a:ext cx="0" cy="0"/>
+          <a:chOff x="0" y="0"/>
+          <a:chExt cx="0" cy="0"/>
+        </a:xfrm>
+      </p:grpSpPr>
+      <p:sp>
+        <p:nvSpPr>
+          <p:cNvPr id="2" name="Slide Image Placeholder 1"/>
+          <p:cNvSpPr>
+            <a:spLocks noGrp="1" noRot="1" noChangeAspect="1"/>
+          </p:cNvSpPr>
+          <p:nvPr>
+            <p:ph type="sldImg"/>
+          </p:nvPr>
+        </p:nvSpPr>
+        <p:spPr/>
+      </p:sp>
+      <p:sp>
+        <p:nvSpPr>
+          <p:cNvPr id="3" name="Notes Placeholder 2"/>
+          <p:cNvSpPr>
+            <a:spLocks noGrp="1"/>
+          </p:cNvSpPr>
+          <p:nvPr>
+            <p:ph type="body" idx="1"/>
+          </p:nvPr>
+        </p:nvSpPr>
+        <p:spPr/>
+        <p:txBody>
+          <a:bodyPr/>
+          <a:lstStyle/>
+          <a:p>
+            <a:r>
+              <a:rPr lang="en-US" dirty="0"/>
+              <a:t/>
+            </a:r>
+            <a:endParaRPr lang="en-US" dirty="0"/>
+          </a:p>
+        </p:txBody>
+      </p:sp>
+      <p:sp>
+        <p:nvSpPr>
+          <p:cNvPr id="4" name="Slide Number Placeholder 3"/>
+          <p:cNvSpPr>
+            <a:spLocks noGrp="1"/>
+          </p:cNvSpPr>
+          <p:nvPr>
+            <p:ph type="sldNum" sz="quarter" idx="10"/>
+          </p:nvPr>
+        </p:nvSpPr>
+        <p:spPr/>
+        <p:txBody>
+          <a:bodyPr/>
+          <a:lstStyle/>
+          <a:p>
+            <a:fld id="{F7021451-1387-4CA6-816F-3879F97B5CBC}" type="slidenum">
+              <a:rPr lang="en-US"/>
+              <a:t>5</a:t>
+            </a:fld>
+            <a:endParaRPr lang="en-US"/>
+          </a:p>
+        </p:txBody>
+      </p:sp>
+    </p:spTree>
+    <p:extLst>
+      <p:ext uri="{BB962C8B-B14F-4D97-AF65-F5344CB8AC3E}">
+        <p14:creationId xmlns:p14="http://schemas.microsoft.com/office/powerpoint/2010/main" val="1024086991"/>
+      </p:ext>
+    </p:extLst>
+  </p:cSld>
+  <p:clrMapOvr>
+    <a:masterClrMapping/>
+  </p:clrMapOvr>
+</p:notes>
+</file>
+
+<file path=ppt/notesSlides/notesSlide6.xml><?xml version="1.0" encoding="utf-8"?>
+<p:notes xmlns:a="http://schemas.openxmlformats.org/drawingml/2006/main" xmlns:r="http://schemas.openxmlformats.org/officeDocument/2006/relationships" xmlns:p="http://schemas.openxmlformats.org/presentationml/2006/main">
+  <p:cSld>
+    <p:spTree>
+      <p:nvGrpSpPr>
+        <p:cNvPr id="1" name=""/>
+        <p:cNvGrpSpPr/>
+        <p:nvPr/>
+      </p:nvGrpSpPr>
+      <p:grpSpPr>
+        <a:xfrm>
+          <a:off x="0" y="0"/>
+          <a:ext cx="0" cy="0"/>
+          <a:chOff x="0" y="0"/>
+          <a:chExt cx="0" cy="0"/>
+        </a:xfrm>
+      </p:grpSpPr>
+      <p:sp>
+        <p:nvSpPr>
+          <p:cNvPr id="2" name="Slide Image Placeholder 1"/>
+          <p:cNvSpPr>
+            <a:spLocks noGrp="1" noRot="1" noChangeAspect="1"/>
+          </p:cNvSpPr>
+          <p:nvPr>
+            <p:ph type="sldImg"/>
+          </p:nvPr>
+        </p:nvSpPr>
+        <p:spPr/>
+      </p:sp>
+      <p:sp>
+        <p:nvSpPr>
+          <p:cNvPr id="3" name="Notes Placeholder 2"/>
+          <p:cNvSpPr>
+            <a:spLocks noGrp="1"/>
+          </p:cNvSpPr>
+          <p:nvPr>
+            <p:ph type="body" idx="1"/>
+          </p:nvPr>
+        </p:nvSpPr>
+        <p:spPr/>
+        <p:txBody>
+          <a:bodyPr/>
+          <a:lstStyle/>
+          <a:p>
+            <a:r>
+              <a:rPr lang="en-US" dirty="0"/>
+              <a:t/>
+            </a:r>
+            <a:endParaRPr lang="en-US" dirty="0"/>
+          </a:p>
+        </p:txBody>
+      </p:sp>
+      <p:sp>
+        <p:nvSpPr>
+          <p:cNvPr id="4" name="Slide Number Placeholder 3"/>
+          <p:cNvSpPr>
+            <a:spLocks noGrp="1"/>
+          </p:cNvSpPr>
+          <p:nvPr>
+            <p:ph type="sldNum" sz="quarter" idx="10"/>
+          </p:nvPr>
+        </p:nvSpPr>
+        <p:spPr/>
+        <p:txBody>
+          <a:bodyPr/>
+          <a:lstStyle/>
+          <a:p>
+            <a:fld id="{F7021451-1387-4CA6-816F-3879F97B5CBC}" type="slidenum">
+              <a:rPr lang="en-US"/>
+              <a:t>6</a:t>
+            </a:fld>
+            <a:endParaRPr lang="en-US"/>
+          </a:p>
+        </p:txBody>
+      </p:sp>
+    </p:spTree>
+    <p:extLst>
+      <p:ext uri="{BB962C8B-B14F-4D97-AF65-F5344CB8AC3E}">
+        <p14:creationId xmlns:p14="http://schemas.microsoft.com/office/powerpoint/2010/main" val="1024086991"/>
+      </p:ext>
+    </p:extLst>
+  </p:cSld>
+  <p:clrMapOvr>
+    <a:masterClrMapping/>
+  </p:clrMapOvr>
+</p:notes>
+</file>
+
+<file path=ppt/notesSlides/notesSlide7.xml><?xml version="1.0" encoding="utf-8"?>
+<p:notes xmlns:a="http://schemas.openxmlformats.org/drawingml/2006/main" xmlns:r="http://schemas.openxmlformats.org/officeDocument/2006/relationships" xmlns:p="http://schemas.openxmlformats.org/presentationml/2006/main">
+  <p:cSld>
+    <p:spTree>
+      <p:nvGrpSpPr>
+        <p:cNvPr id="1" name=""/>
+        <p:cNvGrpSpPr/>
+        <p:nvPr/>
+      </p:nvGrpSpPr>
+      <p:grpSpPr>
+        <a:xfrm>
+          <a:off x="0" y="0"/>
+          <a:ext cx="0" cy="0"/>
+          <a:chOff x="0" y="0"/>
+          <a:chExt cx="0" cy="0"/>
+        </a:xfrm>
+      </p:grpSpPr>
+      <p:sp>
+        <p:nvSpPr>
+          <p:cNvPr id="2" name="Slide Image Placeholder 1"/>
+          <p:cNvSpPr>
+            <a:spLocks noGrp="1" noRot="1" noChangeAspect="1"/>
+          </p:cNvSpPr>
+          <p:nvPr>
+            <p:ph type="sldImg"/>
+          </p:nvPr>
+        </p:nvSpPr>
+        <p:spPr/>
+      </p:sp>
+      <p:sp>
+        <p:nvSpPr>
+          <p:cNvPr id="3" name="Notes Placeholder 2"/>
+          <p:cNvSpPr>
+            <a:spLocks noGrp="1"/>
+          </p:cNvSpPr>
+          <p:nvPr>
+            <p:ph type="body" idx="1"/>
+          </p:nvPr>
+        </p:nvSpPr>
+        <p:spPr/>
+        <p:txBody>
+          <a:bodyPr/>
+          <a:lstStyle/>
+          <a:p>
+            <a:r>
+              <a:rPr lang="en-US" dirty="0"/>
+              <a:t/>
+            </a:r>
+            <a:endParaRPr lang="en-US" dirty="0"/>
+          </a:p>
+        </p:txBody>
+      </p:sp>
+      <p:sp>
+        <p:nvSpPr>
+          <p:cNvPr id="4" name="Slide Number Placeholder 3"/>
+          <p:cNvSpPr>
+            <a:spLocks noGrp="1"/>
+          </p:cNvSpPr>
+          <p:nvPr>
+            <p:ph type="sldNum" sz="quarter" idx="10"/>
+          </p:nvPr>
+        </p:nvSpPr>
+        <p:spPr/>
+        <p:txBody>
+          <a:bodyPr/>
+          <a:lstStyle/>
+          <a:p>
+            <a:fld id="{F7021451-1387-4CA6-816F-3879F97B5CBC}" type="slidenum">
+              <a:rPr lang="en-US"/>
+              <a:t>7</a:t>
+            </a:fld>
+            <a:endParaRPr lang="en-US"/>
+          </a:p>
+        </p:txBody>
+      </p:sp>
+    </p:spTree>
+    <p:extLst>
+      <p:ext uri="{BB962C8B-B14F-4D97-AF65-F5344CB8AC3E}">
+        <p14:creationId xmlns:p14="http://schemas.microsoft.com/office/powerpoint/2010/main" val="1024086991"/>
+      </p:ext>
+    </p:extLst>
+  </p:cSld>
+  <p:clrMapOvr>
+    <a:masterClrMapping/>
+  </p:clrMapOvr>
+</p:notes>
+</file>
+
+<file path=ppt/notesSlides/notesSlide8.xml><?xml version="1.0" encoding="utf-8"?>
+<p:notes xmlns:a="http://schemas.openxmlformats.org/drawingml/2006/main" xmlns:r="http://schemas.openxmlformats.org/officeDocument/2006/relationships" xmlns:p="http://schemas.openxmlformats.org/presentationml/2006/main">
+  <p:cSld>
+    <p:spTree>
+      <p:nvGrpSpPr>
+        <p:cNvPr id="1" name=""/>
+        <p:cNvGrpSpPr/>
+        <p:nvPr/>
+      </p:nvGrpSpPr>
+      <p:grpSpPr>
+        <a:xfrm>
+          <a:off x="0" y="0"/>
+          <a:ext cx="0" cy="0"/>
+          <a:chOff x="0" y="0"/>
+          <a:chExt cx="0" cy="0"/>
+        </a:xfrm>
+      </p:grpSpPr>
+      <p:sp>
+        <p:nvSpPr>
+          <p:cNvPr id="2" name="Slide Image Placeholder 1"/>
+          <p:cNvSpPr>
+            <a:spLocks noGrp="1" noRot="1" noChangeAspect="1"/>
+          </p:cNvSpPr>
+          <p:nvPr>
+            <p:ph type="sldImg"/>
+          </p:nvPr>
+        </p:nvSpPr>
+        <p:spPr/>
+      </p:sp>
+      <p:sp>
+        <p:nvSpPr>
+          <p:cNvPr id="3" name="Notes Placeholder 2"/>
+          <p:cNvSpPr>
+            <a:spLocks noGrp="1"/>
+          </p:cNvSpPr>
+          <p:nvPr>
+            <p:ph type="body" idx="1"/>
+          </p:nvPr>
+        </p:nvSpPr>
+        <p:spPr/>
+        <p:txBody>
+          <a:bodyPr/>
+          <a:lstStyle/>
+          <a:p>
+            <a:r>
+              <a:rPr lang="en-US" dirty="0"/>
+              <a:t/>
+            </a:r>
+            <a:endParaRPr lang="en-US" dirty="0"/>
+          </a:p>
+        </p:txBody>
+      </p:sp>
+      <p:sp>
+        <p:nvSpPr>
+          <p:cNvPr id="4" name="Slide Number Placeholder 3"/>
+          <p:cNvSpPr>
+            <a:spLocks noGrp="1"/>
+          </p:cNvSpPr>
+          <p:nvPr>
+            <p:ph type="sldNum" sz="quarter" idx="10"/>
+          </p:nvPr>
+        </p:nvSpPr>
+        <p:spPr/>
+        <p:txBody>
+          <a:bodyPr/>
+          <a:lstStyle/>
+          <a:p>
+            <a:fld id="{F7021451-1387-4CA6-816F-3879F97B5CBC}" type="slidenum">
+              <a:rPr lang="en-US"/>
+              <a:t>8</a:t>
+            </a:fld>
+            <a:endParaRPr lang="en-US"/>
+          </a:p>
+        </p:txBody>
+      </p:sp>
+    </p:spTree>
+    <p:extLst>
+      <p:ext uri="{BB962C8B-B14F-4D97-AF65-F5344CB8AC3E}">
+        <p14:creationId xmlns:p14="http://schemas.microsoft.com/office/powerpoint/2010/main" val="1024086991"/>
+      </p:ext>
+    </p:extLst>
+  </p:cSld>
+  <p:clrMapOvr>
+    <a:masterClrMapping/>
+  </p:clrMapOvr>
+</p:notes>
+</file>
+
 <file path=ppt/slideLayouts/slideLayout1.xml><?xml version="1.0" encoding="utf-8"?>
 <p:sldLayout xmlns:a="http://schemas.openxmlformats.org/drawingml/2006/main" xmlns:r="http://schemas.openxmlformats.org/officeDocument/2006/relationships" xmlns:p="http://schemas.openxmlformats.org/presentationml/2006/main" preserve="1">
   <p:cSld name="DEFAULT">
@@ -1278,7 +1634,7 @@
               <a:buNone/>
             </a:pPr>
             <a:r>
-              <a:rPr lang="en-US" sz="1600" dirty="0">
+              <a:rPr lang="en-US" sz="1600" i="1" dirty="0">
                 <a:solidFill>
                   <a:srgbClr val="9B9690"/>
                 </a:solidFill>
@@ -1286,7 +1642,7 @@
                 <a:ea typeface="Calibri" pitchFamily="34" charset="-122"/>
                 <a:cs typeface="Calibri" pitchFamily="34" charset="-120"/>
               </a:rPr>
-              <a:t>Replacing variables with numbers</a:t>
+              <a:t>Replacing letters with numbers</a:t>
             </a:r>
             <a:endParaRPr lang="en-US" sz="1600" dirty="0"/>
           </a:p>
@@ -1317,7 +1673,7 @@
               <a:buNone/>
             </a:pPr>
             <a:r>
-              <a:rPr lang="en-US" sz="1100" dirty="0">
+              <a:rPr lang="en-US" sz="1200" dirty="0">
                 <a:solidFill>
                   <a:srgbClr val="6B6660"/>
                 </a:solidFill>
@@ -1325,9 +1681,9 @@
                 <a:ea typeface="Calibri" pitchFamily="34" charset="-122"/>
                 <a:cs typeface="Calibri" pitchFamily="34" charset="-120"/>
               </a:rPr>
-              <a:t>Mr Zocchi · NIS</a:t>
-            </a:r>
-            <a:endParaRPr lang="en-US" sz="1100" dirty="0"/>
+              <a:t>Mr Zocchi</a:t>
+            </a:r>
+            <a:endParaRPr lang="en-US" sz="1200" dirty="0"/>
           </a:p>
         </p:txBody>
       </p:sp>
@@ -1371,41 +1727,21 @@
             <a:avLst/>
           </a:prstGeom>
           <a:solidFill>
-            <a:srgbClr val="FAF8F5"/>
-          </a:solidFill>
-          <a:ln/>
-        </p:spPr>
-      </p:sp>
-      <p:sp>
-        <p:nvSpPr>
-          <p:cNvPr id="3" name="Shape 1"/>
-          <p:cNvSpPr/>
-          <p:nvPr/>
-        </p:nvSpPr>
-        <p:spPr>
-          <a:xfrm>
-            <a:off x="0" y="0"/>
-            <a:ext cx="9144000" cy="54864"/>
-          </a:xfrm>
-          <a:prstGeom prst="rect">
-            <a:avLst/>
-          </a:prstGeom>
-          <a:solidFill>
-            <a:srgbClr val="C8372D"/>
-          </a:solidFill>
-          <a:ln/>
-        </p:spPr>
-      </p:sp>
-      <p:sp>
-        <p:nvSpPr>
-          <p:cNvPr id="4" name="Text 2"/>
-          <p:cNvSpPr/>
-          <p:nvPr/>
-        </p:nvSpPr>
-        <p:spPr>
-          <a:xfrm>
-            <a:off x="640080" y="320040"/>
-            <a:ext cx="7863840" cy="640080"/>
+            <a:srgbClr val="111D35"/>
+          </a:solidFill>
+          <a:ln/>
+        </p:spPr>
+      </p:sp>
+      <p:sp>
+        <p:nvSpPr>
+          <p:cNvPr id="3" name="Text 1"/>
+          <p:cNvSpPr/>
+          <p:nvPr/>
+        </p:nvSpPr>
+        <p:spPr>
+          <a:xfrm>
+            <a:off x="6858000" y="182880"/>
+            <a:ext cx="2286000" cy="2743200"/>
           </a:xfrm>
           <a:prstGeom prst="rect">
             <a:avLst/>
@@ -1414,37 +1750,39 @@
           <a:ln/>
         </p:spPr>
         <p:txBody>
-          <a:bodyPr wrap="square" lIns="0" tIns="0" rIns="0" bIns="0" rtlCol="0" anchor="ctr"/>
-          <a:lstStyle/>
-          <a:p>
-            <a:pPr indent="0" marL="0">
+          <a:bodyPr wrap="square" rtlCol="0" anchor="ctr"/>
+          <a:lstStyle/>
+          <a:p>
+            <a:pPr algn="ctr" indent="0" marL="0">
               <a:buNone/>
             </a:pPr>
             <a:r>
-              <a:rPr lang="en-US" sz="2600" b="1" dirty="0">
-                <a:solidFill>
-                  <a:srgbClr val="1B2A4A"/>
+              <a:rPr lang="en-US" sz="16000" b="1" dirty="0">
+                <a:solidFill>
+                  <a:srgbClr val="C8372D">
+                    <a:alpha val="80000"/>
+                  </a:srgbClr>
                 </a:solidFill>
                 <a:latin typeface="Georgia" pitchFamily="34" charset="0"/>
                 <a:ea typeface="Georgia" pitchFamily="34" charset="-122"/>
                 <a:cs typeface="Georgia" pitchFamily="34" charset="-120"/>
               </a:rPr>
-              <a:t>What Is Substitution?</a:t>
-            </a:r>
-            <a:endParaRPr lang="en-US" sz="2600" dirty="0"/>
-          </a:p>
-        </p:txBody>
-      </p:sp>
-      <p:sp>
-        <p:nvSpPr>
-          <p:cNvPr id="5" name="Text 3"/>
-          <p:cNvSpPr/>
-          <p:nvPr/>
-        </p:nvSpPr>
-        <p:spPr>
-          <a:xfrm>
-            <a:off x="640080" y="1188720"/>
-            <a:ext cx="7863840" cy="3200400"/>
+              <a:t>?</a:t>
+            </a:r>
+            <a:endParaRPr lang="en-US" sz="16000" dirty="0"/>
+          </a:p>
+        </p:txBody>
+      </p:sp>
+      <p:sp>
+        <p:nvSpPr>
+          <p:cNvPr id="4" name="Text 2"/>
+          <p:cNvSpPr/>
+          <p:nvPr/>
+        </p:nvSpPr>
+        <p:spPr>
+          <a:xfrm>
+            <a:off x="731520" y="548640"/>
+            <a:ext cx="2743200" cy="365760"/>
           </a:xfrm>
           <a:prstGeom prst="rect">
             <a:avLst/>
@@ -1453,91 +1791,246 @@
           <a:ln/>
         </p:spPr>
         <p:txBody>
-          <a:bodyPr wrap="square" rtlCol="0" anchor="t"/>
-          <a:lstStyle/>
-          <a:p>
-            <a:pPr marL="342900" indent="-342900">
-              <a:lnSpc>
-                <a:spcPct val="140000"/>
-              </a:lnSpc>
-              <a:buSzPct val="100000"/>
-              <a:buChar char="•"/>
-            </a:pPr>
-            <a:r>
-              <a:rPr lang="en-US" sz="1500" dirty="0">
-                <a:solidFill>
-                  <a:srgbClr val="3D3A36"/>
+          <a:bodyPr wrap="square" rtlCol="0" anchor="ctr"/>
+          <a:lstStyle/>
+          <a:p>
+            <a:pPr indent="0" marL="0">
+              <a:buNone/>
+            </a:pPr>
+            <a:r>
+              <a:rPr lang="en-US" sz="1200" b="1" spc="400" kern="0" dirty="0">
+                <a:solidFill>
+                  <a:srgbClr val="C8372D"/>
                 </a:solidFill>
                 <a:latin typeface="Calibri" pitchFamily="34" charset="0"/>
                 <a:ea typeface="Calibri" pitchFamily="34" charset="-122"/>
                 <a:cs typeface="Calibri" pitchFamily="34" charset="-120"/>
               </a:rPr>
-              <a:t>Substitution = replacing a variable with a number.</a:t>
-            </a:r>
-            <a:endParaRPr lang="en-US" sz="1500" dirty="0"/>
-          </a:p>
-          <a:p>
-            <a:pPr marL="342900" indent="-342900">
-              <a:lnSpc>
-                <a:spcPct val="140000"/>
-              </a:lnSpc>
-              <a:buSzPct val="100000"/>
-              <a:buChar char="•"/>
-            </a:pPr>
-            <a:r>
-              <a:rPr lang="en-US" sz="1500" dirty="0">
-                <a:solidFill>
-                  <a:srgbClr val="3D3A36"/>
+              <a:t>INQUIRY</a:t>
+            </a:r>
+            <a:endParaRPr lang="en-US" sz="1200" dirty="0"/>
+          </a:p>
+        </p:txBody>
+      </p:sp>
+      <p:sp>
+        <p:nvSpPr>
+          <p:cNvPr id="5" name="Text 3"/>
+          <p:cNvSpPr/>
+          <p:nvPr/>
+        </p:nvSpPr>
+        <p:spPr>
+          <a:xfrm>
+            <a:off x="731520" y="1005840"/>
+            <a:ext cx="6858000" cy="1463040"/>
+          </a:xfrm>
+          <a:prstGeom prst="rect">
+            <a:avLst/>
+          </a:prstGeom>
+          <a:noFill/>
+          <a:ln/>
+        </p:spPr>
+        <p:txBody>
+          <a:bodyPr wrap="square" rtlCol="0" anchor="t"/>
+          <a:lstStyle/>
+          <a:p>
+            <a:pPr indent="0" marL="0">
+              <a:buNone/>
+            </a:pPr>
+            <a:r>
+              <a:rPr lang="en-US" sz="2800" b="1" dirty="0">
+                <a:solidFill>
+                  <a:srgbClr val="FFFFFF"/>
+                </a:solidFill>
+                <a:latin typeface="Georgia" pitchFamily="34" charset="0"/>
+                <a:ea typeface="Georgia" pitchFamily="34" charset="-122"/>
+                <a:cs typeface="Georgia" pitchFamily="34" charset="-120"/>
+              </a:rPr>
+              <a:t>The formula for converting °C to °F is F = 1.8C + 32. Today in Nanjing it's 28°C. What's that in Fahrenheit?</a:t>
+            </a:r>
+            <a:endParaRPr lang="en-US" sz="2800" dirty="0"/>
+          </a:p>
+        </p:txBody>
+      </p:sp>
+      <p:sp>
+        <p:nvSpPr>
+          <p:cNvPr id="6" name="Text 4"/>
+          <p:cNvSpPr/>
+          <p:nvPr/>
+        </p:nvSpPr>
+        <p:spPr>
+          <a:xfrm>
+            <a:off x="731520" y="2560320"/>
+            <a:ext cx="6858000" cy="548640"/>
+          </a:xfrm>
+          <a:prstGeom prst="rect">
+            <a:avLst/>
+          </a:prstGeom>
+          <a:noFill/>
+          <a:ln/>
+        </p:spPr>
+        <p:txBody>
+          <a:bodyPr wrap="square" rtlCol="0" anchor="ctr"/>
+          <a:lstStyle/>
+          <a:p>
+            <a:pPr indent="0" marL="0">
+              <a:buNone/>
+            </a:pPr>
+            <a:r>
+              <a:rPr lang="en-US" sz="1400" i="1" dirty="0">
+                <a:solidFill>
+                  <a:srgbClr val="9B9690"/>
                 </a:solidFill>
                 <a:latin typeface="Calibri" pitchFamily="34" charset="0"/>
                 <a:ea typeface="Calibri" pitchFamily="34" charset="-122"/>
                 <a:cs typeface="Calibri" pitchFamily="34" charset="-120"/>
               </a:rPr>
-              <a:t>Then calculate the result using BIDMAS/BODMAS.</a:t>
-            </a:r>
-            <a:endParaRPr lang="en-US" sz="1500" dirty="0"/>
-          </a:p>
-          <a:p>
-            <a:pPr marL="342900" indent="-342900">
-              <a:lnSpc>
-                <a:spcPct val="140000"/>
-              </a:lnSpc>
-              <a:buSzPct val="100000"/>
-              <a:buChar char="•"/>
-            </a:pPr>
-            <a:r>
-              <a:rPr lang="en-US" sz="1500" dirty="0">
-                <a:solidFill>
-                  <a:srgbClr val="3D3A36"/>
+              <a:t>Substitution = replacing a variable with a given number.</a:t>
+            </a:r>
+            <a:endParaRPr lang="en-US" sz="1400" dirty="0"/>
+          </a:p>
+        </p:txBody>
+      </p:sp>
+      <p:sp>
+        <p:nvSpPr>
+          <p:cNvPr id="7" name="Shape 5"/>
+          <p:cNvSpPr/>
+          <p:nvPr/>
+        </p:nvSpPr>
+        <p:spPr>
+          <a:xfrm>
+            <a:off x="548640" y="3200400"/>
+            <a:ext cx="7315200" cy="1645920"/>
+          </a:xfrm>
+          <a:prstGeom prst="rect">
+            <a:avLst/>
+          </a:prstGeom>
+          <a:solidFill>
+            <a:srgbClr val="243660"/>
+          </a:solidFill>
+          <a:ln/>
+        </p:spPr>
+      </p:sp>
+      <p:sp>
+        <p:nvSpPr>
+          <p:cNvPr id="8" name="Text 6"/>
+          <p:cNvSpPr/>
+          <p:nvPr/>
+        </p:nvSpPr>
+        <p:spPr>
+          <a:xfrm>
+            <a:off x="731520" y="3246120"/>
+            <a:ext cx="3657600" cy="320040"/>
+          </a:xfrm>
+          <a:prstGeom prst="rect">
+            <a:avLst/>
+          </a:prstGeom>
+          <a:noFill/>
+          <a:ln/>
+        </p:spPr>
+        <p:txBody>
+          <a:bodyPr wrap="square" rtlCol="0" anchor="ctr"/>
+          <a:lstStyle/>
+          <a:p>
+            <a:pPr indent="0" marL="0">
+              <a:buNone/>
+            </a:pPr>
+            <a:r>
+              <a:rPr lang="en-US" sz="1100" b="1" spc="200" kern="0" dirty="0">
+                <a:solidFill>
+                  <a:srgbClr val="C8372D"/>
                 </a:solidFill>
                 <a:latin typeface="Calibri" pitchFamily="34" charset="0"/>
                 <a:ea typeface="Calibri" pitchFamily="34" charset="-122"/>
                 <a:cs typeface="Calibri" pitchFamily="34" charset="-120"/>
               </a:rPr>
-              <a:t>Example: If a = 4 and b = 3, find 2a + b - 1</a:t>
-            </a:r>
-            <a:endParaRPr lang="en-US" sz="1500" dirty="0"/>
-          </a:p>
+              <a:t>Think — Pair — Share</a:t>
+            </a:r>
+            <a:endParaRPr lang="en-US" sz="1100" dirty="0"/>
+          </a:p>
+        </p:txBody>
+      </p:sp>
+      <p:sp>
+        <p:nvSpPr>
+          <p:cNvPr id="9" name="Text 7"/>
+          <p:cNvSpPr/>
+          <p:nvPr/>
+        </p:nvSpPr>
+        <p:spPr>
+          <a:xfrm>
+            <a:off x="731520" y="3566160"/>
+            <a:ext cx="6949440" cy="1188720"/>
+          </a:xfrm>
+          <a:prstGeom prst="rect">
+            <a:avLst/>
+          </a:prstGeom>
+          <a:noFill/>
+          <a:ln/>
+        </p:spPr>
+        <p:txBody>
+          <a:bodyPr wrap="square" rtlCol="0" anchor="ctr"/>
+          <a:lstStyle/>
           <a:p>
             <a:pPr marL="342900" indent="-342900">
-              <a:lnSpc>
-                <a:spcPct val="140000"/>
-              </a:lnSpc>
+              <a:spcAft>
+                <a:spcPts val="600"/>
+              </a:spcAft>
               <a:buSzPct val="100000"/>
               <a:buChar char="•"/>
             </a:pPr>
             <a:r>
-              <a:rPr lang="en-US" sz="1500" dirty="0">
-                <a:solidFill>
-                  <a:srgbClr val="3D3A36"/>
+              <a:rPr lang="en-US" sz="1400" dirty="0">
+                <a:solidFill>
+                  <a:srgbClr val="E5E2DC"/>
                 </a:solidFill>
                 <a:latin typeface="Calibri" pitchFamily="34" charset="0"/>
                 <a:ea typeface="Calibri" pitchFamily="34" charset="-122"/>
                 <a:cs typeface="Calibri" pitchFamily="34" charset="-120"/>
               </a:rPr>
-              <a:t>= 2(4) + 3 - 1 = 8 + 3 - 1 = 10</a:t>
-            </a:r>
-            <a:endParaRPr lang="en-US" sz="1500" dirty="0"/>
+              <a:t>How would you use this formula step by step?</a:t>
+            </a:r>
+            <a:endParaRPr lang="en-US" sz="1400" dirty="0"/>
+          </a:p>
+          <a:p>
+            <a:pPr marL="342900" indent="-342900">
+              <a:spcAft>
+                <a:spcPts val="600"/>
+              </a:spcAft>
+              <a:buSzPct val="100000"/>
+              <a:buChar char="•"/>
+            </a:pPr>
+            <a:r>
+              <a:rPr lang="en-US" sz="1400" dirty="0">
+                <a:solidFill>
+                  <a:srgbClr val="E5E2DC"/>
+                </a:solidFill>
+                <a:latin typeface="Calibri" pitchFamily="34" charset="0"/>
+                <a:ea typeface="Calibri" pitchFamily="34" charset="-122"/>
+                <a:cs typeface="Calibri" pitchFamily="34" charset="-120"/>
+              </a:rPr>
+              <a:t>What if it's −5°C in Nanjing during winter?</a:t>
+            </a:r>
+            <a:endParaRPr lang="en-US" sz="1400" dirty="0"/>
+          </a:p>
+          <a:p>
+            <a:pPr marL="342900" indent="-342900">
+              <a:spcAft>
+                <a:spcPts val="600"/>
+              </a:spcAft>
+              <a:buSzPct val="100000"/>
+              <a:buChar char="•"/>
+            </a:pPr>
+            <a:r>
+              <a:rPr lang="en-US" sz="1400" dirty="0">
+                <a:solidFill>
+                  <a:srgbClr val="E5E2DC"/>
+                </a:solidFill>
+                <a:latin typeface="Calibri" pitchFamily="34" charset="0"/>
+                <a:ea typeface="Calibri" pitchFamily="34" charset="-122"/>
+                <a:cs typeface="Calibri" pitchFamily="34" charset="-120"/>
+              </a:rPr>
+              <a:t>Could you convert a temperature from Berlin too?</a:t>
+            </a:r>
+            <a:endParaRPr lang="en-US" sz="1400" dirty="0"/>
           </a:p>
         </p:txBody>
       </p:sp>
@@ -1552,6 +2045,13 @@
 <file path=ppt/slides/slide3.xml><?xml version="1.0" encoding="utf-8"?>
 <p:sld xmlns:a="http://schemas.openxmlformats.org/drawingml/2006/main" xmlns:r="http://schemas.openxmlformats.org/officeDocument/2006/relationships" xmlns:p="http://schemas.openxmlformats.org/presentationml/2006/main">
   <p:cSld name="Slide 3">
+    <p:bg>
+      <p:bgPr>
+        <a:solidFill>
+          <a:srgbClr val="FAF8F5"/>
+        </a:solidFill>
+      </p:bgPr>
+    </p:bg>
     <p:spTree>
       <p:nvGrpSpPr>
         <p:cNvPr id="1" name=""/>
@@ -1575,13 +2075,13 @@
         <p:spPr>
           <a:xfrm>
             <a:off x="0" y="0"/>
-            <a:ext cx="9144000" cy="5143500"/>
-          </a:xfrm>
-          <a:prstGeom prst="rect">
-            <a:avLst/>
-          </a:prstGeom>
-          <a:solidFill>
-            <a:srgbClr val="FAF8F5"/>
+            <a:ext cx="9144000" cy="822960"/>
+          </a:xfrm>
+          <a:prstGeom prst="rect">
+            <a:avLst/>
+          </a:prstGeom>
+          <a:solidFill>
+            <a:srgbClr val="FFFFFF"/>
           </a:solidFill>
           <a:ln/>
         </p:spPr>
@@ -1594,8 +2094,8 @@
         </p:nvSpPr>
         <p:spPr>
           <a:xfrm>
-            <a:off x="0" y="0"/>
-            <a:ext cx="9144000" cy="54864"/>
+            <a:off x="0" y="795528"/>
+            <a:ext cx="9144000" cy="27432"/>
           </a:xfrm>
           <a:prstGeom prst="rect">
             <a:avLst/>
@@ -1614,7 +2114,7 @@
         </p:nvSpPr>
         <p:spPr>
           <a:xfrm>
-            <a:off x="640080" y="320040"/>
+            <a:off x="640080" y="91440"/>
             <a:ext cx="7863840" cy="640080"/>
           </a:xfrm>
           <a:prstGeom prst="rect">
@@ -1631,7 +2131,7 @@
               <a:buNone/>
             </a:pPr>
             <a:r>
-              <a:rPr lang="en-US" sz="2600" b="1" dirty="0">
+              <a:rPr lang="en-US" sz="2200" b="1" dirty="0">
                 <a:solidFill>
                   <a:srgbClr val="1B2A4A"/>
                 </a:solidFill>
@@ -1639,9 +2139,9 @@
                 <a:ea typeface="Georgia" pitchFamily="34" charset="-122"/>
                 <a:cs typeface="Georgia" pitchFamily="34" charset="-120"/>
               </a:rPr>
-              <a:t>More Examples</a:t>
-            </a:r>
-            <a:endParaRPr lang="en-US" sz="2600" dirty="0"/>
+              <a:t>What Is Substitution?</a:t>
+            </a:r>
+            <a:endParaRPr lang="en-US" sz="2200" dirty="0"/>
           </a:p>
         </p:txBody>
       </p:sp>
@@ -1653,8 +2153,8 @@
         </p:nvSpPr>
         <p:spPr>
           <a:xfrm>
-            <a:off x="640080" y="1188720"/>
-            <a:ext cx="7863840" cy="3200400"/>
+            <a:off x="640080" y="1005840"/>
+            <a:ext cx="7863840" cy="2926080"/>
           </a:xfrm>
           <a:prstGeom prst="rect">
             <a:avLst/>
@@ -1663,18 +2163,18 @@
           <a:ln/>
         </p:spPr>
         <p:txBody>
-          <a:bodyPr wrap="square" rtlCol="0" anchor="t"/>
+          <a:bodyPr wrap="square" rtlCol="0" anchor="ctr"/>
           <a:lstStyle/>
           <a:p>
             <a:pPr marL="342900" indent="-342900">
-              <a:lnSpc>
-                <a:spcPct val="140000"/>
-              </a:lnSpc>
+              <a:spcAft>
+                <a:spcPts val="800"/>
+              </a:spcAft>
               <a:buSzPct val="100000"/>
               <a:buChar char="•"/>
             </a:pPr>
             <a:r>
-              <a:rPr lang="en-US" sz="1500" dirty="0">
+              <a:rPr lang="en-US" sz="1600" dirty="0">
                 <a:solidFill>
                   <a:srgbClr val="3D3A36"/>
                 </a:solidFill>
@@ -1682,20 +2182,20 @@
                 <a:ea typeface="Calibri" pitchFamily="34" charset="-122"/>
                 <a:cs typeface="Calibri" pitchFamily="34" charset="-120"/>
               </a:rPr>
-              <a:t>If x = 5, find x² + 3 → (5)² + 3 = 25 + 3 = 28</a:t>
-            </a:r>
-            <a:endParaRPr lang="en-US" sz="1500" dirty="0"/>
+              <a:t>Replace a variable with a given number.</a:t>
+            </a:r>
+            <a:endParaRPr lang="en-US" sz="1600" dirty="0"/>
           </a:p>
           <a:p>
             <a:pPr marL="342900" indent="-342900">
-              <a:lnSpc>
-                <a:spcPct val="140000"/>
-              </a:lnSpc>
+              <a:spcAft>
+                <a:spcPts val="800"/>
+              </a:spcAft>
               <a:buSzPct val="100000"/>
               <a:buChar char="•"/>
             </a:pPr>
             <a:r>
-              <a:rPr lang="en-US" sz="1500" dirty="0">
+              <a:rPr lang="en-US" sz="1600" dirty="0">
                 <a:solidFill>
                   <a:srgbClr val="3D3A36"/>
                 </a:solidFill>
@@ -1703,20 +2203,20 @@
                 <a:ea typeface="Calibri" pitchFamily="34" charset="-122"/>
                 <a:cs typeface="Calibri" pitchFamily="34" charset="-120"/>
               </a:rPr>
-              <a:t>If m = 6, n = 2, find 3(m - n) → 3(6 - 2) = 3(4) = 12</a:t>
-            </a:r>
-            <a:endParaRPr lang="en-US" sz="1500" dirty="0"/>
+              <a:t>If x = 3, then 2x + 1 = 2(3) + 1 = 7.</a:t>
+            </a:r>
+            <a:endParaRPr lang="en-US" sz="1600" dirty="0"/>
           </a:p>
           <a:p>
             <a:pPr marL="342900" indent="-342900">
-              <a:lnSpc>
-                <a:spcPct val="140000"/>
-              </a:lnSpc>
+              <a:spcAft>
+                <a:spcPts val="800"/>
+              </a:spcAft>
               <a:buSzPct val="100000"/>
               <a:buChar char="•"/>
             </a:pPr>
             <a:r>
-              <a:rPr lang="en-US" sz="1500" dirty="0">
+              <a:rPr lang="en-US" sz="1600" dirty="0">
                 <a:solidFill>
                   <a:srgbClr val="3D3A36"/>
                 </a:solidFill>
@@ -1724,20 +2224,20 @@
                 <a:ea typeface="Calibri" pitchFamily="34" charset="-122"/>
                 <a:cs typeface="Calibri" pitchFamily="34" charset="-120"/>
               </a:rPr>
-              <a:t>If p = 3, find 2p² → 2(3)² = 2(9) = 18</a:t>
-            </a:r>
-            <a:endParaRPr lang="en-US" sz="1500" dirty="0"/>
+              <a:t>Always use BRACKETS when substituting.</a:t>
+            </a:r>
+            <a:endParaRPr lang="en-US" sz="1600" dirty="0"/>
           </a:p>
           <a:p>
             <a:pPr marL="342900" indent="-342900">
-              <a:lnSpc>
-                <a:spcPct val="140000"/>
-              </a:lnSpc>
+              <a:spcAft>
+                <a:spcPts val="800"/>
+              </a:spcAft>
               <a:buSzPct val="100000"/>
               <a:buChar char="•"/>
             </a:pPr>
             <a:r>
-              <a:rPr lang="en-US" sz="1500" dirty="0">
+              <a:rPr lang="en-US" sz="1600" dirty="0">
                 <a:solidFill>
                   <a:srgbClr val="3D3A36"/>
                 </a:solidFill>
@@ -1745,9 +2245,9 @@
                 <a:ea typeface="Calibri" pitchFamily="34" charset="-122"/>
                 <a:cs typeface="Calibri" pitchFamily="34" charset="-120"/>
               </a:rPr>
-              <a:t>Always do brackets first, then indices (powers)!</a:t>
-            </a:r>
-            <a:endParaRPr lang="en-US" sz="1500" dirty="0"/>
+              <a:t>Follow BIDMAS after substituting.</a:t>
+            </a:r>
+            <a:endParaRPr lang="en-US" sz="1600" dirty="0"/>
           </a:p>
         </p:txBody>
       </p:sp>
@@ -1759,30 +2259,55 @@
         </p:nvSpPr>
         <p:spPr>
           <a:xfrm>
-            <a:off x="640080" y="4206240"/>
-            <a:ext cx="7863840" cy="640080"/>
-          </a:xfrm>
-          <a:prstGeom prst="roundRect">
-            <a:avLst>
-              <a:gd name="adj" fmla="val 11429"/>
-            </a:avLst>
+            <a:off x="640080" y="4114800"/>
+            <a:ext cx="7863840" cy="731520"/>
+          </a:xfrm>
+          <a:prstGeom prst="rect">
+            <a:avLst/>
           </a:prstGeom>
           <a:solidFill>
             <a:srgbClr val="E8F5F3"/>
           </a:solidFill>
           <a:ln/>
-        </p:spPr>
-      </p:sp>
-      <p:sp>
-        <p:nvSpPr>
-          <p:cNvPr id="7" name="Text 5"/>
-          <p:cNvSpPr/>
-          <p:nvPr/>
-        </p:nvSpPr>
-        <p:spPr>
-          <a:xfrm>
-            <a:off x="822960" y="4251960"/>
-            <a:ext cx="7498080" cy="548640"/>
+          <a:effectLst>
+            <a:outerShdw sx="100000" sy="100000" kx="0" ky="0" algn="bl" rotWithShape="0" blurRad="76200" dist="25400" dir="8100000">
+              <a:srgbClr val="000000">
+                <a:alpha val="12000"/>
+              </a:srgbClr>
+            </a:outerShdw>
+          </a:effectLst>
+        </p:spPr>
+      </p:sp>
+      <p:sp>
+        <p:nvSpPr>
+          <p:cNvPr id="7" name="Shape 5"/>
+          <p:cNvSpPr/>
+          <p:nvPr/>
+        </p:nvSpPr>
+        <p:spPr>
+          <a:xfrm>
+            <a:off x="640080" y="4114800"/>
+            <a:ext cx="64008" cy="731520"/>
+          </a:xfrm>
+          <a:prstGeom prst="rect">
+            <a:avLst/>
+          </a:prstGeom>
+          <a:solidFill>
+            <a:srgbClr val="C8372D"/>
+          </a:solidFill>
+          <a:ln/>
+        </p:spPr>
+      </p:sp>
+      <p:sp>
+        <p:nvSpPr>
+          <p:cNvPr id="8" name="Text 6"/>
+          <p:cNvSpPr/>
+          <p:nvPr/>
+        </p:nvSpPr>
+        <p:spPr>
+          <a:xfrm>
+            <a:off x="914400" y="4160520"/>
+            <a:ext cx="7406640" cy="640080"/>
           </a:xfrm>
           <a:prstGeom prst="rect">
             <a:avLst/>
@@ -1798,17 +2323,17 @@
               <a:buNone/>
             </a:pPr>
             <a:r>
-              <a:rPr lang="en-US" sz="1200" i="1" dirty="0">
-                <a:solidFill>
-                  <a:srgbClr val="2A9D8F"/>
+              <a:rPr lang="en-US" sz="1300" i="1" dirty="0">
+                <a:solidFill>
+                  <a:srgbClr val="3D3A36"/>
                 </a:solidFill>
                 <a:latin typeface="Calibri" pitchFamily="34" charset="0"/>
                 <a:ea typeface="Calibri" pitchFamily="34" charset="-122"/>
                 <a:cs typeface="Calibri" pitchFamily="34" charset="-120"/>
               </a:rPr>
-              <a:t>BIDMAS: Brackets, Indices, Division/Multiplication, Addition/Subtraction</a:t>
-            </a:r>
-            <a:endParaRPr lang="en-US" sz="1200" dirty="0"/>
+              <a:t>Common mistake: 2x with x=3 is 2×3=6, NOT 23.</a:t>
+            </a:r>
+            <a:endParaRPr lang="en-US" sz="1300" dirty="0"/>
           </a:p>
         </p:txBody>
       </p:sp>
@@ -1823,6 +2348,13 @@
 <file path=ppt/slides/slide4.xml><?xml version="1.0" encoding="utf-8"?>
 <p:sld xmlns:a="http://schemas.openxmlformats.org/drawingml/2006/main" xmlns:r="http://schemas.openxmlformats.org/officeDocument/2006/relationships" xmlns:p="http://schemas.openxmlformats.org/presentationml/2006/main">
   <p:cSld name="Slide 4">
+    <p:bg>
+      <p:bgPr>
+        <a:solidFill>
+          <a:srgbClr val="FAF8F5"/>
+        </a:solidFill>
+      </p:bgPr>
+    </p:bg>
     <p:spTree>
       <p:nvGrpSpPr>
         <p:cNvPr id="1" name=""/>
@@ -1846,13 +2378,13 @@
         <p:spPr>
           <a:xfrm>
             <a:off x="0" y="0"/>
-            <a:ext cx="9144000" cy="5143500"/>
-          </a:xfrm>
-          <a:prstGeom prst="rect">
-            <a:avLst/>
-          </a:prstGeom>
-          <a:solidFill>
-            <a:srgbClr val="1B2A4A"/>
+            <a:ext cx="9144000" cy="822960"/>
+          </a:xfrm>
+          <a:prstGeom prst="rect">
+            <a:avLst/>
+          </a:prstGeom>
+          <a:solidFill>
+            <a:srgbClr val="FFFFFF"/>
           </a:solidFill>
           <a:ln/>
         </p:spPr>
@@ -1865,8 +2397,8 @@
         </p:nvSpPr>
         <p:spPr>
           <a:xfrm>
-            <a:off x="0" y="4777740"/>
-            <a:ext cx="9144000" cy="365760"/>
+            <a:off x="0" y="795528"/>
+            <a:ext cx="9144000" cy="27432"/>
           </a:xfrm>
           <a:prstGeom prst="rect">
             <a:avLst/>
@@ -1885,8 +2417,8 @@
         </p:nvSpPr>
         <p:spPr>
           <a:xfrm>
-            <a:off x="731520" y="1371600"/>
-            <a:ext cx="7680960" cy="914400"/>
+            <a:off x="640080" y="91440"/>
+            <a:ext cx="7863840" cy="640080"/>
           </a:xfrm>
           <a:prstGeom prst="rect">
             <a:avLst/>
@@ -1895,24 +2427,24 @@
           <a:ln/>
         </p:spPr>
         <p:txBody>
-          <a:bodyPr wrap="square" rtlCol="0" anchor="ctr"/>
-          <a:lstStyle/>
-          <a:p>
-            <a:pPr algn="ctr" indent="0" marL="0">
+          <a:bodyPr wrap="square" lIns="0" tIns="0" rIns="0" bIns="0" rtlCol="0" anchor="ctr"/>
+          <a:lstStyle/>
+          <a:p>
+            <a:pPr indent="0" marL="0">
               <a:buNone/>
             </a:pPr>
             <a:r>
-              <a:rPr lang="en-US" sz="3600" b="1" dirty="0">
-                <a:solidFill>
-                  <a:srgbClr val="FFFFFF"/>
+              <a:rPr lang="en-US" sz="2200" b="1" dirty="0">
+                <a:solidFill>
+                  <a:srgbClr val="1B2A4A"/>
                 </a:solidFill>
                 <a:latin typeface="Georgia" pitchFamily="34" charset="0"/>
                 <a:ea typeface="Georgia" pitchFamily="34" charset="-122"/>
                 <a:cs typeface="Georgia" pitchFamily="34" charset="-120"/>
               </a:rPr>
-              <a:t>Review &amp; Practise</a:t>
-            </a:r>
-            <a:endParaRPr lang="en-US" sz="3600" dirty="0"/>
+              <a:t>Substituting into Formulas</a:t>
+            </a:r>
+            <a:endParaRPr lang="en-US" sz="2200" dirty="0"/>
           </a:p>
         </p:txBody>
       </p:sp>
@@ -1924,8 +2456,8 @@
         </p:nvSpPr>
         <p:spPr>
           <a:xfrm>
-            <a:off x="731520" y="2468880"/>
-            <a:ext cx="7680960" cy="548640"/>
+            <a:off x="640080" y="1005840"/>
+            <a:ext cx="7863840" cy="2926080"/>
           </a:xfrm>
           <a:prstGeom prst="rect">
             <a:avLst/>
@@ -1937,60 +2469,1650 @@
           <a:bodyPr wrap="square" rtlCol="0" anchor="ctr"/>
           <a:lstStyle/>
           <a:p>
-            <a:pPr algn="ctr" indent="0" marL="0">
-              <a:buNone/>
-            </a:pPr>
-            <a:r>
-              <a:rPr lang="en-US" sz="1800" dirty="0">
-                <a:solidFill>
-                  <a:srgbClr val="C8372D"/>
+            <a:pPr marL="342900" indent="-342900">
+              <a:spcAft>
+                <a:spcPts val="800"/>
+              </a:spcAft>
+              <a:buSzPct val="100000"/>
+              <a:buChar char="•"/>
+            </a:pPr>
+            <a:r>
+              <a:rPr lang="en-US" sz="1600" dirty="0">
+                <a:solidFill>
+                  <a:srgbClr val="3D3A36"/>
                 </a:solidFill>
                 <a:latin typeface="Calibri" pitchFamily="34" charset="0"/>
                 <a:ea typeface="Calibri" pitchFamily="34" charset="-122"/>
                 <a:cs typeface="Calibri" pitchFamily="34" charset="-120"/>
               </a:rPr>
-              <a:t>learnlattice.org/students/exam-revision</a:t>
-            </a:r>
-            <a:endParaRPr lang="en-US" sz="1800" dirty="0"/>
-          </a:p>
-        </p:txBody>
-      </p:sp>
-      <p:sp>
-        <p:nvSpPr>
-          <p:cNvPr id="6" name="Text 4"/>
-          <p:cNvSpPr/>
-          <p:nvPr/>
-        </p:nvSpPr>
-        <p:spPr>
-          <a:xfrm>
-            <a:off x="731520" y="3200400"/>
-            <a:ext cx="7680960" cy="457200"/>
-          </a:xfrm>
-          <a:prstGeom prst="rect">
-            <a:avLst/>
-          </a:prstGeom>
-          <a:noFill/>
-          <a:ln/>
-        </p:spPr>
-        <p:txBody>
-          <a:bodyPr wrap="square" rtlCol="0" anchor="ctr"/>
-          <a:lstStyle/>
-          <a:p>
-            <a:pPr algn="ctr" indent="0" marL="0">
-              <a:buNone/>
-            </a:pPr>
-            <a:r>
-              <a:rPr lang="en-US" sz="1400" dirty="0">
-                <a:solidFill>
-                  <a:srgbClr val="9B9690"/>
+              <a:t>Area: A = ½bh. If b=6, h=4 → A = 12.</a:t>
+            </a:r>
+            <a:endParaRPr lang="en-US" sz="1600" dirty="0"/>
+          </a:p>
+          <a:p>
+            <a:pPr marL="342900" indent="-342900">
+              <a:spcAft>
+                <a:spcPts val="800"/>
+              </a:spcAft>
+              <a:buSzPct val="100000"/>
+              <a:buChar char="•"/>
+            </a:pPr>
+            <a:r>
+              <a:rPr lang="en-US" sz="1600" dirty="0">
+                <a:solidFill>
+                  <a:srgbClr val="3D3A36"/>
                 </a:solidFill>
                 <a:latin typeface="Calibri" pitchFamily="34" charset="0"/>
                 <a:ea typeface="Calibri" pitchFamily="34" charset="-122"/>
                 <a:cs typeface="Calibri" pitchFamily="34" charset="-120"/>
               </a:rPr>
+              <a:t>Speed: s = d/t. Nanjing to Shanghai = 300 km in 1.5 hrs → s = 200 km/h.</a:t>
+            </a:r>
+            <a:endParaRPr lang="en-US" sz="1600" dirty="0"/>
+          </a:p>
+          <a:p>
+            <a:pPr marL="342900" indent="-342900">
+              <a:spcAft>
+                <a:spcPts val="800"/>
+              </a:spcAft>
+              <a:buSzPct val="100000"/>
+              <a:buChar char="•"/>
+            </a:pPr>
+            <a:r>
+              <a:rPr lang="en-US" sz="1600" dirty="0">
+                <a:solidFill>
+                  <a:srgbClr val="3D3A36"/>
+                </a:solidFill>
+                <a:latin typeface="Calibri" pitchFamily="34" charset="0"/>
+                <a:ea typeface="Calibri" pitchFamily="34" charset="-122"/>
+                <a:cs typeface="Calibri" pitchFamily="34" charset="-120"/>
+              </a:rPr>
+              <a:t>Temperature: F = 1.8(28) + 32 = 82.4°F.</a:t>
+            </a:r>
+            <a:endParaRPr lang="en-US" sz="1600" dirty="0"/>
+          </a:p>
+          <a:p>
+            <a:pPr marL="342900" indent="-342900">
+              <a:spcAft>
+                <a:spcPts val="800"/>
+              </a:spcAft>
+              <a:buSzPct val="100000"/>
+              <a:buChar char="•"/>
+            </a:pPr>
+            <a:r>
+              <a:rPr lang="en-US" sz="1600" dirty="0">
+                <a:solidFill>
+                  <a:srgbClr val="3D3A36"/>
+                </a:solidFill>
+                <a:latin typeface="Calibri" pitchFamily="34" charset="0"/>
+                <a:ea typeface="Calibri" pitchFamily="34" charset="-122"/>
+                <a:cs typeface="Calibri" pitchFamily="34" charset="-120"/>
+              </a:rPr>
+              <a:t>Show working: Formula → Substitution → Answer.</a:t>
+            </a:r>
+            <a:endParaRPr lang="en-US" sz="1600" dirty="0"/>
+          </a:p>
+        </p:txBody>
+      </p:sp>
+    </p:spTree>
+  </p:cSld>
+  <p:clrMapOvr>
+    <a:masterClrMapping/>
+  </p:clrMapOvr>
+</p:sld>
+</file>
+
+<file path=ppt/slides/slide5.xml><?xml version="1.0" encoding="utf-8"?>
+<p:sld xmlns:a="http://schemas.openxmlformats.org/drawingml/2006/main" xmlns:r="http://schemas.openxmlformats.org/officeDocument/2006/relationships" xmlns:p="http://schemas.openxmlformats.org/presentationml/2006/main">
+  <p:cSld name="Slide 5">
+    <p:bg>
+      <p:bgPr>
+        <a:solidFill>
+          <a:srgbClr val="FAF8F5"/>
+        </a:solidFill>
+      </p:bgPr>
+    </p:bg>
+    <p:spTree>
+      <p:nvGrpSpPr>
+        <p:cNvPr id="1" name=""/>
+        <p:cNvGrpSpPr/>
+        <p:nvPr/>
+      </p:nvGrpSpPr>
+      <p:grpSpPr>
+        <a:xfrm>
+          <a:off x="0" y="0"/>
+          <a:ext cx="0" cy="0"/>
+          <a:chOff x="0" y="0"/>
+          <a:chExt cx="0" cy="0"/>
+        </a:xfrm>
+      </p:grpSpPr>
+      <p:sp>
+        <p:nvSpPr>
+          <p:cNvPr id="2" name="Shape 0"/>
+          <p:cNvSpPr/>
+          <p:nvPr/>
+        </p:nvSpPr>
+        <p:spPr>
+          <a:xfrm>
+            <a:off x="0" y="0"/>
+            <a:ext cx="9144000" cy="822960"/>
+          </a:xfrm>
+          <a:prstGeom prst="rect">
+            <a:avLst/>
+          </a:prstGeom>
+          <a:solidFill>
+            <a:srgbClr val="FFFFFF"/>
+          </a:solidFill>
+          <a:ln/>
+        </p:spPr>
+      </p:sp>
+      <p:sp>
+        <p:nvSpPr>
+          <p:cNvPr id="3" name="Shape 1"/>
+          <p:cNvSpPr/>
+          <p:nvPr/>
+        </p:nvSpPr>
+        <p:spPr>
+          <a:xfrm>
+            <a:off x="0" y="795528"/>
+            <a:ext cx="9144000" cy="27432"/>
+          </a:xfrm>
+          <a:prstGeom prst="rect">
+            <a:avLst/>
+          </a:prstGeom>
+          <a:solidFill>
+            <a:srgbClr val="C8372D"/>
+          </a:solidFill>
+          <a:ln/>
+        </p:spPr>
+      </p:sp>
+      <p:sp>
+        <p:nvSpPr>
+          <p:cNvPr id="4" name="Text 2"/>
+          <p:cNvSpPr/>
+          <p:nvPr/>
+        </p:nvSpPr>
+        <p:spPr>
+          <a:xfrm>
+            <a:off x="640080" y="91440"/>
+            <a:ext cx="7863840" cy="640080"/>
+          </a:xfrm>
+          <a:prstGeom prst="rect">
+            <a:avLst/>
+          </a:prstGeom>
+          <a:noFill/>
+          <a:ln/>
+        </p:spPr>
+        <p:txBody>
+          <a:bodyPr wrap="square" lIns="0" tIns="0" rIns="0" bIns="0" rtlCol="0" anchor="ctr"/>
+          <a:lstStyle/>
+          <a:p>
+            <a:pPr indent="0" marL="0">
+              <a:buNone/>
+            </a:pPr>
+            <a:r>
+              <a:rPr lang="en-US" sz="2200" b="1" dirty="0">
+                <a:solidFill>
+                  <a:srgbClr val="1B2A4A"/>
+                </a:solidFill>
+                <a:latin typeface="Georgia" pitchFamily="34" charset="0"/>
+                <a:ea typeface="Georgia" pitchFamily="34" charset="-122"/>
+                <a:cs typeface="Georgia" pitchFamily="34" charset="-120"/>
+              </a:rPr>
+              <a:t>Negative Numbers</a:t>
+            </a:r>
+            <a:endParaRPr lang="en-US" sz="2200" dirty="0"/>
+          </a:p>
+        </p:txBody>
+      </p:sp>
+      <p:sp>
+        <p:nvSpPr>
+          <p:cNvPr id="5" name="Shape 3"/>
+          <p:cNvSpPr/>
+          <p:nvPr/>
+        </p:nvSpPr>
+        <p:spPr>
+          <a:xfrm>
+            <a:off x="457200" y="1005840"/>
+            <a:ext cx="3931920" cy="3657600"/>
+          </a:xfrm>
+          <a:prstGeom prst="rect">
+            <a:avLst/>
+          </a:prstGeom>
+          <a:solidFill>
+            <a:srgbClr val="FFFFFF"/>
+          </a:solidFill>
+          <a:ln/>
+          <a:effectLst>
+            <a:outerShdw sx="100000" sy="100000" kx="0" ky="0" algn="bl" rotWithShape="0" blurRad="76200" dist="25400" dir="8100000">
+              <a:srgbClr val="000000">
+                <a:alpha val="12000"/>
+              </a:srgbClr>
+            </a:outerShdw>
+          </a:effectLst>
+        </p:spPr>
+      </p:sp>
+      <p:sp>
+        <p:nvSpPr>
+          <p:cNvPr id="6" name="Shape 4"/>
+          <p:cNvSpPr/>
+          <p:nvPr/>
+        </p:nvSpPr>
+        <p:spPr>
+          <a:xfrm>
+            <a:off x="457200" y="1005840"/>
+            <a:ext cx="3931920" cy="64008"/>
+          </a:xfrm>
+          <a:prstGeom prst="rect">
+            <a:avLst/>
+          </a:prstGeom>
+          <a:solidFill>
+            <a:srgbClr val="C8372D"/>
+          </a:solidFill>
+          <a:ln/>
+        </p:spPr>
+      </p:sp>
+      <p:sp>
+        <p:nvSpPr>
+          <p:cNvPr id="7" name="Text 5"/>
+          <p:cNvSpPr/>
+          <p:nvPr/>
+        </p:nvSpPr>
+        <p:spPr>
+          <a:xfrm>
+            <a:off x="640080" y="1188720"/>
+            <a:ext cx="3566160" cy="457200"/>
+          </a:xfrm>
+          <a:prstGeom prst="rect">
+            <a:avLst/>
+          </a:prstGeom>
+          <a:noFill/>
+          <a:ln/>
+        </p:spPr>
+        <p:txBody>
+          <a:bodyPr wrap="square" rtlCol="0" anchor="ctr"/>
+          <a:lstStyle/>
+          <a:p>
+            <a:pPr indent="0" marL="0">
+              <a:buNone/>
+            </a:pPr>
+            <a:r>
+              <a:rPr lang="en-US" sz="1600" b="1" dirty="0">
+                <a:solidFill>
+                  <a:srgbClr val="C8372D"/>
+                </a:solidFill>
+                <a:latin typeface="Calibri" pitchFamily="34" charset="0"/>
+                <a:ea typeface="Calibri" pitchFamily="34" charset="-122"/>
+                <a:cs typeface="Calibri" pitchFamily="34" charset="-120"/>
+              </a:rPr>
+              <a:t>Watch Out For</a:t>
+            </a:r>
+            <a:endParaRPr lang="en-US" sz="1600" dirty="0"/>
+          </a:p>
+        </p:txBody>
+      </p:sp>
+      <p:sp>
+        <p:nvSpPr>
+          <p:cNvPr id="8" name="Text 6"/>
+          <p:cNvSpPr/>
+          <p:nvPr/>
+        </p:nvSpPr>
+        <p:spPr>
+          <a:xfrm>
+            <a:off x="640080" y="1691640"/>
+            <a:ext cx="3566160" cy="2743200"/>
+          </a:xfrm>
+          <a:prstGeom prst="rect">
+            <a:avLst/>
+          </a:prstGeom>
+          <a:noFill/>
+          <a:ln/>
+        </p:spPr>
+        <p:txBody>
+          <a:bodyPr wrap="square" rtlCol="0" anchor="ctr"/>
+          <a:lstStyle/>
+          <a:p>
+            <a:pPr marL="342900" indent="-342900">
+              <a:spcAft>
+                <a:spcPts val="600"/>
+              </a:spcAft>
+              <a:buSzPct val="100000"/>
+              <a:buChar char="•"/>
+            </a:pPr>
+            <a:r>
+              <a:rPr lang="en-US" sz="1400" dirty="0">
+                <a:solidFill>
+                  <a:srgbClr val="3D3A36"/>
+                </a:solidFill>
+                <a:latin typeface="Calibri" pitchFamily="34" charset="0"/>
+                <a:ea typeface="Calibri" pitchFamily="34" charset="-122"/>
+                <a:cs typeface="Calibri" pitchFamily="34" charset="-120"/>
+              </a:rPr>
+              <a:t>(−3)² = 9, not −9.</a:t>
+            </a:r>
+            <a:endParaRPr lang="en-US" sz="1400" dirty="0"/>
+          </a:p>
+          <a:p>
+            <a:pPr marL="342900" indent="-342900">
+              <a:spcAft>
+                <a:spcPts val="600"/>
+              </a:spcAft>
+              <a:buSzPct val="100000"/>
+              <a:buChar char="•"/>
+            </a:pPr>
+            <a:r>
+              <a:rPr lang="en-US" sz="1400" dirty="0">
+                <a:solidFill>
+                  <a:srgbClr val="3D3A36"/>
+                </a:solidFill>
+                <a:latin typeface="Calibri" pitchFamily="34" charset="0"/>
+                <a:ea typeface="Calibri" pitchFamily="34" charset="-122"/>
+                <a:cs typeface="Calibri" pitchFamily="34" charset="-120"/>
+              </a:rPr>
+              <a:t>2 × (−4) = −8.</a:t>
+            </a:r>
+            <a:endParaRPr lang="en-US" sz="1400" dirty="0"/>
+          </a:p>
+          <a:p>
+            <a:pPr marL="342900" indent="-342900">
+              <a:spcAft>
+                <a:spcPts val="600"/>
+              </a:spcAft>
+              <a:buSzPct val="100000"/>
+              <a:buChar char="•"/>
+            </a:pPr>
+            <a:r>
+              <a:rPr lang="en-US" sz="1400" dirty="0">
+                <a:solidFill>
+                  <a:srgbClr val="3D3A36"/>
+                </a:solidFill>
+                <a:latin typeface="Calibri" pitchFamily="34" charset="0"/>
+                <a:ea typeface="Calibri" pitchFamily="34" charset="-122"/>
+                <a:cs typeface="Calibri" pitchFamily="34" charset="-120"/>
+              </a:rPr>
+              <a:t>5 − (−3) = 5 + 3 = 8.</a:t>
+            </a:r>
+            <a:endParaRPr lang="en-US" sz="1400" dirty="0"/>
+          </a:p>
+        </p:txBody>
+      </p:sp>
+      <p:sp>
+        <p:nvSpPr>
+          <p:cNvPr id="9" name="Shape 7"/>
+          <p:cNvSpPr/>
+          <p:nvPr/>
+        </p:nvSpPr>
+        <p:spPr>
+          <a:xfrm>
+            <a:off x="4754880" y="1005840"/>
+            <a:ext cx="3931920" cy="3657600"/>
+          </a:xfrm>
+          <a:prstGeom prst="rect">
+            <a:avLst/>
+          </a:prstGeom>
+          <a:solidFill>
+            <a:srgbClr val="FFFFFF"/>
+          </a:solidFill>
+          <a:ln/>
+          <a:effectLst>
+            <a:outerShdw sx="100000" sy="100000" kx="0" ky="0" algn="bl" rotWithShape="0" blurRad="76200" dist="25400" dir="8100000">
+              <a:srgbClr val="000000">
+                <a:alpha val="12000"/>
+              </a:srgbClr>
+            </a:outerShdw>
+          </a:effectLst>
+        </p:spPr>
+      </p:sp>
+      <p:sp>
+        <p:nvSpPr>
+          <p:cNvPr id="10" name="Shape 8"/>
+          <p:cNvSpPr/>
+          <p:nvPr/>
+        </p:nvSpPr>
+        <p:spPr>
+          <a:xfrm>
+            <a:off x="4754880" y="1005840"/>
+            <a:ext cx="3931920" cy="64008"/>
+          </a:xfrm>
+          <a:prstGeom prst="rect">
+            <a:avLst/>
+          </a:prstGeom>
+          <a:solidFill>
+            <a:srgbClr val="E9C46A"/>
+          </a:solidFill>
+          <a:ln/>
+        </p:spPr>
+      </p:sp>
+      <p:sp>
+        <p:nvSpPr>
+          <p:cNvPr id="11" name="Text 9"/>
+          <p:cNvSpPr/>
+          <p:nvPr/>
+        </p:nvSpPr>
+        <p:spPr>
+          <a:xfrm>
+            <a:off x="4937760" y="1188720"/>
+            <a:ext cx="3566160" cy="457200"/>
+          </a:xfrm>
+          <a:prstGeom prst="rect">
+            <a:avLst/>
+          </a:prstGeom>
+          <a:noFill/>
+          <a:ln/>
+        </p:spPr>
+        <p:txBody>
+          <a:bodyPr wrap="square" rtlCol="0" anchor="ctr"/>
+          <a:lstStyle/>
+          <a:p>
+            <a:pPr indent="0" marL="0">
+              <a:buNone/>
+            </a:pPr>
+            <a:r>
+              <a:rPr lang="en-US" sz="1600" b="1" dirty="0">
+                <a:solidFill>
+                  <a:srgbClr val="E9C46A"/>
+                </a:solidFill>
+                <a:latin typeface="Calibri" pitchFamily="34" charset="0"/>
+                <a:ea typeface="Calibri" pitchFamily="34" charset="-122"/>
+                <a:cs typeface="Calibri" pitchFamily="34" charset="-120"/>
+              </a:rPr>
+              <a:t>Tips</a:t>
+            </a:r>
+            <a:endParaRPr lang="en-US" sz="1600" dirty="0"/>
+          </a:p>
+        </p:txBody>
+      </p:sp>
+      <p:sp>
+        <p:nvSpPr>
+          <p:cNvPr id="12" name="Text 10"/>
+          <p:cNvSpPr/>
+          <p:nvPr/>
+        </p:nvSpPr>
+        <p:spPr>
+          <a:xfrm>
+            <a:off x="4937760" y="1691640"/>
+            <a:ext cx="3566160" cy="2743200"/>
+          </a:xfrm>
+          <a:prstGeom prst="rect">
+            <a:avLst/>
+          </a:prstGeom>
+          <a:noFill/>
+          <a:ln/>
+        </p:spPr>
+        <p:txBody>
+          <a:bodyPr wrap="square" rtlCol="0" anchor="ctr"/>
+          <a:lstStyle/>
+          <a:p>
+            <a:pPr marL="342900" indent="-342900">
+              <a:spcAft>
+                <a:spcPts val="600"/>
+              </a:spcAft>
+              <a:buSzPct val="100000"/>
+              <a:buChar char="•"/>
+            </a:pPr>
+            <a:r>
+              <a:rPr lang="en-US" sz="1400" dirty="0">
+                <a:solidFill>
+                  <a:srgbClr val="3D3A36"/>
+                </a:solidFill>
+                <a:latin typeface="Calibri" pitchFamily="34" charset="0"/>
+                <a:ea typeface="Calibri" pitchFamily="34" charset="-122"/>
+                <a:cs typeface="Calibri" pitchFamily="34" charset="-120"/>
+              </a:rPr>
+              <a:t>Brackets around negatives.</a:t>
+            </a:r>
+            <a:endParaRPr lang="en-US" sz="1400" dirty="0"/>
+          </a:p>
+          <a:p>
+            <a:pPr marL="342900" indent="-342900">
+              <a:spcAft>
+                <a:spcPts val="600"/>
+              </a:spcAft>
+              <a:buSzPct val="100000"/>
+              <a:buChar char="•"/>
+            </a:pPr>
+            <a:r>
+              <a:rPr lang="en-US" sz="1400" dirty="0">
+                <a:solidFill>
+                  <a:srgbClr val="3D3A36"/>
+                </a:solidFill>
+                <a:latin typeface="Calibri" pitchFamily="34" charset="0"/>
+                <a:ea typeface="Calibri" pitchFamily="34" charset="-122"/>
+                <a:cs typeface="Calibri" pitchFamily="34" charset="-120"/>
+              </a:rPr>
+              <a:t>Two negatives together → positive.</a:t>
+            </a:r>
+            <a:endParaRPr lang="en-US" sz="1400" dirty="0"/>
+          </a:p>
+          <a:p>
+            <a:pPr marL="342900" indent="-342900">
+              <a:spcAft>
+                <a:spcPts val="600"/>
+              </a:spcAft>
+              <a:buSzPct val="100000"/>
+              <a:buChar char="•"/>
+            </a:pPr>
+            <a:r>
+              <a:rPr lang="en-US" sz="1400" dirty="0">
+                <a:solidFill>
+                  <a:srgbClr val="3D3A36"/>
+                </a:solidFill>
+                <a:latin typeface="Calibri" pitchFamily="34" charset="0"/>
+                <a:ea typeface="Calibri" pitchFamily="34" charset="-122"/>
+                <a:cs typeface="Calibri" pitchFamily="34" charset="-120"/>
+              </a:rPr>
+              <a:t>Nanjing winter: F = 1.8(−5)+32 = 23°F.</a:t>
+            </a:r>
+            <a:endParaRPr lang="en-US" sz="1400" dirty="0"/>
+          </a:p>
+        </p:txBody>
+      </p:sp>
+    </p:spTree>
+  </p:cSld>
+  <p:clrMapOvr>
+    <a:masterClrMapping/>
+  </p:clrMapOvr>
+</p:sld>
+</file>
+
+<file path=ppt/slides/slide6.xml><?xml version="1.0" encoding="utf-8"?>
+<p:sld xmlns:a="http://schemas.openxmlformats.org/drawingml/2006/main" xmlns:r="http://schemas.openxmlformats.org/officeDocument/2006/relationships" xmlns:p="http://schemas.openxmlformats.org/presentationml/2006/main">
+  <p:cSld name="Slide 6">
+    <p:bg>
+      <p:bgPr>
+        <a:solidFill>
+          <a:srgbClr val="FAF8F5"/>
+        </a:solidFill>
+      </p:bgPr>
+    </p:bg>
+    <p:spTree>
+      <p:nvGrpSpPr>
+        <p:cNvPr id="1" name=""/>
+        <p:cNvGrpSpPr/>
+        <p:nvPr/>
+      </p:nvGrpSpPr>
+      <p:grpSpPr>
+        <a:xfrm>
+          <a:off x="0" y="0"/>
+          <a:ext cx="0" cy="0"/>
+          <a:chOff x="0" y="0"/>
+          <a:chExt cx="0" cy="0"/>
+        </a:xfrm>
+      </p:grpSpPr>
+      <p:sp>
+        <p:nvSpPr>
+          <p:cNvPr id="2" name="Shape 0"/>
+          <p:cNvSpPr/>
+          <p:nvPr/>
+        </p:nvSpPr>
+        <p:spPr>
+          <a:xfrm>
+            <a:off x="0" y="0"/>
+            <a:ext cx="9144000" cy="822960"/>
+          </a:xfrm>
+          <a:prstGeom prst="rect">
+            <a:avLst/>
+          </a:prstGeom>
+          <a:solidFill>
+            <a:srgbClr val="FFFFFF"/>
+          </a:solidFill>
+          <a:ln/>
+        </p:spPr>
+      </p:sp>
+      <p:sp>
+        <p:nvSpPr>
+          <p:cNvPr id="3" name="Shape 1"/>
+          <p:cNvSpPr/>
+          <p:nvPr/>
+        </p:nvSpPr>
+        <p:spPr>
+          <a:xfrm>
+            <a:off x="0" y="795528"/>
+            <a:ext cx="9144000" cy="27432"/>
+          </a:xfrm>
+          <a:prstGeom prst="rect">
+            <a:avLst/>
+          </a:prstGeom>
+          <a:solidFill>
+            <a:srgbClr val="C8372D"/>
+          </a:solidFill>
+          <a:ln/>
+        </p:spPr>
+      </p:sp>
+      <p:sp>
+        <p:nvSpPr>
+          <p:cNvPr id="4" name="Text 2"/>
+          <p:cNvSpPr/>
+          <p:nvPr/>
+        </p:nvSpPr>
+        <p:spPr>
+          <a:xfrm>
+            <a:off x="640080" y="91440"/>
+            <a:ext cx="7863840" cy="640080"/>
+          </a:xfrm>
+          <a:prstGeom prst="rect">
+            <a:avLst/>
+          </a:prstGeom>
+          <a:noFill/>
+          <a:ln/>
+        </p:spPr>
+        <p:txBody>
+          <a:bodyPr wrap="square" lIns="0" tIns="0" rIns="0" bIns="0" rtlCol="0" anchor="ctr"/>
+          <a:lstStyle/>
+          <a:p>
+            <a:pPr indent="0" marL="0">
+              <a:buNone/>
+            </a:pPr>
+            <a:r>
+              <a:rPr lang="en-US" sz="2200" b="1" dirty="0">
+                <a:solidFill>
+                  <a:srgbClr val="1B2A4A"/>
+                </a:solidFill>
+                <a:latin typeface="Georgia" pitchFamily="34" charset="0"/>
+                <a:ea typeface="Georgia" pitchFamily="34" charset="-122"/>
+                <a:cs typeface="Georgia" pitchFamily="34" charset="-120"/>
+              </a:rPr>
+              <a:t>Substitution with Powers</a:t>
+            </a:r>
+            <a:endParaRPr lang="en-US" sz="2200" dirty="0"/>
+          </a:p>
+        </p:txBody>
+      </p:sp>
+      <p:sp>
+        <p:nvSpPr>
+          <p:cNvPr id="5" name="Text 3"/>
+          <p:cNvSpPr/>
+          <p:nvPr/>
+        </p:nvSpPr>
+        <p:spPr>
+          <a:xfrm>
+            <a:off x="640080" y="1005840"/>
+            <a:ext cx="7863840" cy="2926080"/>
+          </a:xfrm>
+          <a:prstGeom prst="rect">
+            <a:avLst/>
+          </a:prstGeom>
+          <a:noFill/>
+          <a:ln/>
+        </p:spPr>
+        <p:txBody>
+          <a:bodyPr wrap="square" rtlCol="0" anchor="ctr"/>
+          <a:lstStyle/>
+          <a:p>
+            <a:pPr marL="342900" indent="-342900">
+              <a:spcAft>
+                <a:spcPts val="800"/>
+              </a:spcAft>
+              <a:buSzPct val="100000"/>
+              <a:buChar char="•"/>
+            </a:pPr>
+            <a:r>
+              <a:rPr lang="en-US" sz="1600" dirty="0">
+                <a:solidFill>
+                  <a:srgbClr val="3D3A36"/>
+                </a:solidFill>
+                <a:latin typeface="Calibri" pitchFamily="34" charset="0"/>
+                <a:ea typeface="Calibri" pitchFamily="34" charset="-122"/>
+                <a:cs typeface="Calibri" pitchFamily="34" charset="-120"/>
+              </a:rPr>
+              <a:t>x² means x × x, NOT x × 2.</a:t>
+            </a:r>
+            <a:endParaRPr lang="en-US" sz="1600" dirty="0"/>
+          </a:p>
+          <a:p>
+            <a:pPr marL="342900" indent="-342900">
+              <a:spcAft>
+                <a:spcPts val="800"/>
+              </a:spcAft>
+              <a:buSzPct val="100000"/>
+              <a:buChar char="•"/>
+            </a:pPr>
+            <a:r>
+              <a:rPr lang="en-US" sz="1600" dirty="0">
+                <a:solidFill>
+                  <a:srgbClr val="3D3A36"/>
+                </a:solidFill>
+                <a:latin typeface="Calibri" pitchFamily="34" charset="0"/>
+                <a:ea typeface="Calibri" pitchFamily="34" charset="-122"/>
+                <a:cs typeface="Calibri" pitchFamily="34" charset="-120"/>
+              </a:rPr>
+              <a:t>x = 5: x² = 25.</a:t>
+            </a:r>
+            <a:endParaRPr lang="en-US" sz="1600" dirty="0"/>
+          </a:p>
+          <a:p>
+            <a:pPr marL="342900" indent="-342900">
+              <a:spcAft>
+                <a:spcPts val="800"/>
+              </a:spcAft>
+              <a:buSzPct val="100000"/>
+              <a:buChar char="•"/>
+            </a:pPr>
+            <a:r>
+              <a:rPr lang="en-US" sz="1600" dirty="0">
+                <a:solidFill>
+                  <a:srgbClr val="3D3A36"/>
+                </a:solidFill>
+                <a:latin typeface="Calibri" pitchFamily="34" charset="0"/>
+                <a:ea typeface="Calibri" pitchFamily="34" charset="-122"/>
+                <a:cs typeface="Calibri" pitchFamily="34" charset="-120"/>
+              </a:rPr>
+              <a:t>x = −4: x² = 16 (positive!).</a:t>
+            </a:r>
+            <a:endParaRPr lang="en-US" sz="1600" dirty="0"/>
+          </a:p>
+          <a:p>
+            <a:pPr marL="342900" indent="-342900">
+              <a:spcAft>
+                <a:spcPts val="800"/>
+              </a:spcAft>
+              <a:buSzPct val="100000"/>
+              <a:buChar char="•"/>
+            </a:pPr>
+            <a:r>
+              <a:rPr lang="en-US" sz="1600" dirty="0">
+                <a:solidFill>
+                  <a:srgbClr val="3D3A36"/>
+                </a:solidFill>
+                <a:latin typeface="Calibri" pitchFamily="34" charset="0"/>
+                <a:ea typeface="Calibri" pitchFamily="34" charset="-122"/>
+                <a:cs typeface="Calibri" pitchFamily="34" charset="-120"/>
+              </a:rPr>
+              <a:t>2x² means 2 × x² (square first, then ×2).</a:t>
+            </a:r>
+            <a:endParaRPr lang="en-US" sz="1600" dirty="0"/>
+          </a:p>
+          <a:p>
+            <a:pPr marL="342900" indent="-342900">
+              <a:spcAft>
+                <a:spcPts val="800"/>
+              </a:spcAft>
+              <a:buSzPct val="100000"/>
+              <a:buChar char="•"/>
+            </a:pPr>
+            <a:r>
+              <a:rPr lang="en-US" sz="1600" dirty="0">
+                <a:solidFill>
+                  <a:srgbClr val="3D3A36"/>
+                </a:solidFill>
+                <a:latin typeface="Calibri" pitchFamily="34" charset="0"/>
+                <a:ea typeface="Calibri" pitchFamily="34" charset="-122"/>
+                <a:cs typeface="Calibri" pitchFamily="34" charset="-120"/>
+              </a:rPr>
+              <a:t>x = 3: 2x² = 2 × 9 = 18.</a:t>
+            </a:r>
+            <a:endParaRPr lang="en-US" sz="1600" dirty="0"/>
+          </a:p>
+        </p:txBody>
+      </p:sp>
+      <p:sp>
+        <p:nvSpPr>
+          <p:cNvPr id="6" name="Shape 4"/>
+          <p:cNvSpPr/>
+          <p:nvPr/>
+        </p:nvSpPr>
+        <p:spPr>
+          <a:xfrm>
+            <a:off x="640080" y="4114800"/>
+            <a:ext cx="7863840" cy="731520"/>
+          </a:xfrm>
+          <a:prstGeom prst="rect">
+            <a:avLst/>
+          </a:prstGeom>
+          <a:solidFill>
+            <a:srgbClr val="E8F5F3"/>
+          </a:solidFill>
+          <a:ln/>
+          <a:effectLst>
+            <a:outerShdw sx="100000" sy="100000" kx="0" ky="0" algn="bl" rotWithShape="0" blurRad="76200" dist="25400" dir="8100000">
+              <a:srgbClr val="000000">
+                <a:alpha val="12000"/>
+              </a:srgbClr>
+            </a:outerShdw>
+          </a:effectLst>
+        </p:spPr>
+      </p:sp>
+      <p:sp>
+        <p:nvSpPr>
+          <p:cNvPr id="7" name="Shape 5"/>
+          <p:cNvSpPr/>
+          <p:nvPr/>
+        </p:nvSpPr>
+        <p:spPr>
+          <a:xfrm>
+            <a:off x="640080" y="4114800"/>
+            <a:ext cx="64008" cy="731520"/>
+          </a:xfrm>
+          <a:prstGeom prst="rect">
+            <a:avLst/>
+          </a:prstGeom>
+          <a:solidFill>
+            <a:srgbClr val="C8372D"/>
+          </a:solidFill>
+          <a:ln/>
+        </p:spPr>
+      </p:sp>
+      <p:sp>
+        <p:nvSpPr>
+          <p:cNvPr id="8" name="Text 6"/>
+          <p:cNvSpPr/>
+          <p:nvPr/>
+        </p:nvSpPr>
+        <p:spPr>
+          <a:xfrm>
+            <a:off x="914400" y="4160520"/>
+            <a:ext cx="7406640" cy="640080"/>
+          </a:xfrm>
+          <a:prstGeom prst="rect">
+            <a:avLst/>
+          </a:prstGeom>
+          <a:noFill/>
+          <a:ln/>
+        </p:spPr>
+        <p:txBody>
+          <a:bodyPr wrap="square" rtlCol="0" anchor="ctr"/>
+          <a:lstStyle/>
+          <a:p>
+            <a:pPr indent="0" marL="0">
+              <a:buNone/>
+            </a:pPr>
+            <a:r>
+              <a:rPr lang="en-US" sz="1300" i="1" dirty="0">
+                <a:solidFill>
+                  <a:srgbClr val="3D3A36"/>
+                </a:solidFill>
+                <a:latin typeface="Calibri" pitchFamily="34" charset="0"/>
+                <a:ea typeface="Calibri" pitchFamily="34" charset="-122"/>
+                <a:cs typeface="Calibri" pitchFamily="34" charset="-120"/>
+              </a:rPr>
+              <a:t>BIDMAS: Powers before multiplication.</a:t>
+            </a:r>
+            <a:endParaRPr lang="en-US" sz="1300" dirty="0"/>
+          </a:p>
+        </p:txBody>
+      </p:sp>
+    </p:spTree>
+  </p:cSld>
+  <p:clrMapOvr>
+    <a:masterClrMapping/>
+  </p:clrMapOvr>
+</p:sld>
+</file>
+
+<file path=ppt/slides/slide7.xml><?xml version="1.0" encoding="utf-8"?>
+<p:sld xmlns:a="http://schemas.openxmlformats.org/drawingml/2006/main" xmlns:r="http://schemas.openxmlformats.org/officeDocument/2006/relationships" xmlns:p="http://schemas.openxmlformats.org/presentationml/2006/main">
+  <p:cSld name="Slide 7">
+    <p:bg>
+      <p:bgPr>
+        <a:solidFill>
+          <a:srgbClr val="FAF8F5"/>
+        </a:solidFill>
+      </p:bgPr>
+    </p:bg>
+    <p:spTree>
+      <p:nvGrpSpPr>
+        <p:cNvPr id="1" name=""/>
+        <p:cNvGrpSpPr/>
+        <p:nvPr/>
+      </p:nvGrpSpPr>
+      <p:grpSpPr>
+        <a:xfrm>
+          <a:off x="0" y="0"/>
+          <a:ext cx="0" cy="0"/>
+          <a:chOff x="0" y="0"/>
+          <a:chExt cx="0" cy="0"/>
+        </a:xfrm>
+      </p:grpSpPr>
+      <p:sp>
+        <p:nvSpPr>
+          <p:cNvPr id="2" name="Shape 0"/>
+          <p:cNvSpPr/>
+          <p:nvPr/>
+        </p:nvSpPr>
+        <p:spPr>
+          <a:xfrm>
+            <a:off x="0" y="0"/>
+            <a:ext cx="9144000" cy="822960"/>
+          </a:xfrm>
+          <a:prstGeom prst="rect">
+            <a:avLst/>
+          </a:prstGeom>
+          <a:solidFill>
+            <a:srgbClr val="FFFFFF"/>
+          </a:solidFill>
+          <a:ln/>
+        </p:spPr>
+      </p:sp>
+      <p:sp>
+        <p:nvSpPr>
+          <p:cNvPr id="3" name="Shape 1"/>
+          <p:cNvSpPr/>
+          <p:nvPr/>
+        </p:nvSpPr>
+        <p:spPr>
+          <a:xfrm>
+            <a:off x="0" y="795528"/>
+            <a:ext cx="9144000" cy="27432"/>
+          </a:xfrm>
+          <a:prstGeom prst="rect">
+            <a:avLst/>
+          </a:prstGeom>
+          <a:solidFill>
+            <a:srgbClr val="C8372D"/>
+          </a:solidFill>
+          <a:ln/>
+        </p:spPr>
+      </p:sp>
+      <p:sp>
+        <p:nvSpPr>
+          <p:cNvPr id="4" name="Text 2"/>
+          <p:cNvSpPr/>
+          <p:nvPr/>
+        </p:nvSpPr>
+        <p:spPr>
+          <a:xfrm>
+            <a:off x="640080" y="91440"/>
+            <a:ext cx="7863840" cy="640080"/>
+          </a:xfrm>
+          <a:prstGeom prst="rect">
+            <a:avLst/>
+          </a:prstGeom>
+          <a:noFill/>
+          <a:ln/>
+        </p:spPr>
+        <p:txBody>
+          <a:bodyPr wrap="square" lIns="0" tIns="0" rIns="0" bIns="0" rtlCol="0" anchor="ctr"/>
+          <a:lstStyle/>
+          <a:p>
+            <a:pPr indent="0" marL="0">
+              <a:buNone/>
+            </a:pPr>
+            <a:r>
+              <a:rPr lang="en-US" sz="2200" b="1" dirty="0">
+                <a:solidFill>
+                  <a:srgbClr val="1B2A4A"/>
+                </a:solidFill>
+                <a:latin typeface="Georgia" pitchFamily="34" charset="0"/>
+                <a:ea typeface="Georgia" pitchFamily="34" charset="-122"/>
+                <a:cs typeface="Georgia" pitchFamily="34" charset="-120"/>
+              </a:rPr>
+              <a:t>Recommended Videos</a:t>
+            </a:r>
+            <a:endParaRPr lang="en-US" sz="2200" dirty="0"/>
+          </a:p>
+        </p:txBody>
+      </p:sp>
+      <p:sp>
+        <p:nvSpPr>
+          <p:cNvPr id="5" name="Text 3"/>
+          <p:cNvSpPr/>
+          <p:nvPr/>
+        </p:nvSpPr>
+        <p:spPr>
+          <a:xfrm>
+            <a:off x="640080" y="868680"/>
+            <a:ext cx="7863840" cy="274320"/>
+          </a:xfrm>
+          <a:prstGeom prst="rect">
+            <a:avLst/>
+          </a:prstGeom>
+          <a:noFill/>
+          <a:ln/>
+        </p:spPr>
+        <p:txBody>
+          <a:bodyPr wrap="square" rtlCol="0" anchor="ctr"/>
+          <a:lstStyle/>
+          <a:p>
+            <a:pPr indent="0" marL="0">
+              <a:buNone/>
+            </a:pPr>
+            <a:r>
+              <a:rPr lang="en-US" sz="1200" i="1" dirty="0">
+                <a:solidFill>
+                  <a:srgbClr val="6B6660"/>
+                </a:solidFill>
+                <a:latin typeface="Calibri" pitchFamily="34" charset="0"/>
+                <a:ea typeface="Calibri" pitchFamily="34" charset="-122"/>
+                <a:cs typeface="Calibri" pitchFamily="34" charset="-120"/>
+              </a:rPr>
+              <a:t>Search these on YouTube to learn more.</a:t>
+            </a:r>
+            <a:endParaRPr lang="en-US" sz="1200" dirty="0"/>
+          </a:p>
+        </p:txBody>
+      </p:sp>
+      <p:sp>
+        <p:nvSpPr>
+          <p:cNvPr id="6" name="Shape 4"/>
+          <p:cNvSpPr/>
+          <p:nvPr/>
+        </p:nvSpPr>
+        <p:spPr>
+          <a:xfrm>
+            <a:off x="457200" y="1234440"/>
+            <a:ext cx="8229600" cy="1051560"/>
+          </a:xfrm>
+          <a:prstGeom prst="rect">
+            <a:avLst/>
+          </a:prstGeom>
+          <a:solidFill>
+            <a:srgbClr val="FFFFFF"/>
+          </a:solidFill>
+          <a:ln/>
+          <a:effectLst>
+            <a:outerShdw sx="100000" sy="100000" kx="0" ky="0" algn="bl" rotWithShape="0" blurRad="76200" dist="25400" dir="8100000">
+              <a:srgbClr val="000000">
+                <a:alpha val="12000"/>
+              </a:srgbClr>
+            </a:outerShdw>
+          </a:effectLst>
+        </p:spPr>
+      </p:sp>
+      <p:sp>
+        <p:nvSpPr>
+          <p:cNvPr id="7" name="Shape 5"/>
+          <p:cNvSpPr/>
+          <p:nvPr/>
+        </p:nvSpPr>
+        <p:spPr>
+          <a:xfrm>
+            <a:off x="457200" y="1234440"/>
+            <a:ext cx="64008" cy="1051560"/>
+          </a:xfrm>
+          <a:prstGeom prst="rect">
+            <a:avLst/>
+          </a:prstGeom>
+          <a:solidFill>
+            <a:srgbClr val="C8372D"/>
+          </a:solidFill>
+          <a:ln/>
+        </p:spPr>
+      </p:sp>
+      <p:sp>
+        <p:nvSpPr>
+          <p:cNvPr id="8" name="Text 6"/>
+          <p:cNvSpPr/>
+          <p:nvPr/>
+        </p:nvSpPr>
+        <p:spPr>
+          <a:xfrm>
+            <a:off x="640080" y="1325880"/>
+            <a:ext cx="457200" cy="457200"/>
+          </a:xfrm>
+          <a:prstGeom prst="rect">
+            <a:avLst/>
+          </a:prstGeom>
+          <a:noFill/>
+          <a:ln/>
+        </p:spPr>
+        <p:txBody>
+          <a:bodyPr wrap="square" rtlCol="0" anchor="ctr"/>
+          <a:lstStyle/>
+          <a:p>
+            <a:pPr algn="ctr" indent="0" marL="0">
+              <a:buNone/>
+            </a:pPr>
+            <a:r>
+              <a:rPr lang="en-US" sz="2000" dirty="0">
+                <a:solidFill>
+                  <a:srgbClr val="C8372D"/>
+                </a:solidFill>
+                <a:latin typeface="Calibri" pitchFamily="34" charset="0"/>
+                <a:ea typeface="Calibri" pitchFamily="34" charset="-122"/>
+                <a:cs typeface="Calibri" pitchFamily="34" charset="-120"/>
+              </a:rPr>
+              <a:t>▶</a:t>
+            </a:r>
+            <a:endParaRPr lang="en-US" sz="2000" dirty="0"/>
+          </a:p>
+        </p:txBody>
+      </p:sp>
+      <p:sp>
+        <p:nvSpPr>
+          <p:cNvPr id="9" name="Text 7"/>
+          <p:cNvSpPr/>
+          <p:nvPr/>
+        </p:nvSpPr>
+        <p:spPr>
+          <a:xfrm>
+            <a:off x="1188720" y="1307592"/>
+            <a:ext cx="7132320" cy="411480"/>
+          </a:xfrm>
+          <a:prstGeom prst="rect">
+            <a:avLst/>
+          </a:prstGeom>
+          <a:noFill/>
+          <a:ln/>
+        </p:spPr>
+        <p:txBody>
+          <a:bodyPr wrap="square" rtlCol="0" anchor="ctr"/>
+          <a:lstStyle/>
+          <a:p>
+            <a:pPr indent="0" marL="0">
+              <a:buNone/>
+            </a:pPr>
+            <a:r>
+              <a:rPr lang="en-US" sz="1400" b="1" dirty="0">
+                <a:solidFill>
+                  <a:srgbClr val="1B2A4A"/>
+                </a:solidFill>
+                <a:latin typeface="Calibri" pitchFamily="34" charset="0"/>
+                <a:ea typeface="Calibri" pitchFamily="34" charset="-122"/>
+                <a:cs typeface="Calibri" pitchFamily="34" charset="-120"/>
+              </a:rPr>
+              <a:t>Substitution into Expressions</a:t>
+            </a:r>
+            <a:endParaRPr lang="en-US" sz="1400" dirty="0"/>
+          </a:p>
+        </p:txBody>
+      </p:sp>
+      <p:sp>
+        <p:nvSpPr>
+          <p:cNvPr id="10" name="Text 8"/>
+          <p:cNvSpPr/>
+          <p:nvPr/>
+        </p:nvSpPr>
+        <p:spPr>
+          <a:xfrm>
+            <a:off x="1188720" y="1691640"/>
+            <a:ext cx="7132320" cy="320040"/>
+          </a:xfrm>
+          <a:prstGeom prst="rect">
+            <a:avLst/>
+          </a:prstGeom>
+          <a:noFill/>
+          <a:ln/>
+        </p:spPr>
+        <p:txBody>
+          <a:bodyPr wrap="square" rtlCol="0" anchor="ctr"/>
+          <a:lstStyle/>
+          <a:p>
+            <a:pPr indent="0" marL="0">
+              <a:buNone/>
+            </a:pPr>
+            <a:r>
+              <a:rPr lang="en-US" sz="1100" dirty="0">
+                <a:solidFill>
+                  <a:srgbClr val="6B6660"/>
+                </a:solidFill>
+                <a:latin typeface="Calibri" pitchFamily="34" charset="0"/>
+                <a:ea typeface="Calibri" pitchFamily="34" charset="-122"/>
+                <a:cs typeface="Calibri" pitchFamily="34" charset="-120"/>
+              </a:rPr>
+              <a:t>Corbettmaths  •  5 min</a:t>
+            </a:r>
+            <a:endParaRPr lang="en-US" sz="1100" dirty="0"/>
+          </a:p>
+        </p:txBody>
+      </p:sp>
+      <p:sp>
+        <p:nvSpPr>
+          <p:cNvPr id="11" name="Shape 9"/>
+          <p:cNvSpPr/>
+          <p:nvPr/>
+        </p:nvSpPr>
+        <p:spPr>
+          <a:xfrm>
+            <a:off x="457200" y="2423160"/>
+            <a:ext cx="8229600" cy="1051560"/>
+          </a:xfrm>
+          <a:prstGeom prst="rect">
+            <a:avLst/>
+          </a:prstGeom>
+          <a:solidFill>
+            <a:srgbClr val="FFFFFF"/>
+          </a:solidFill>
+          <a:ln/>
+          <a:effectLst>
+            <a:outerShdw sx="100000" sy="100000" kx="0" ky="0" algn="bl" rotWithShape="0" blurRad="76200" dist="25400" dir="8100000">
+              <a:srgbClr val="000000">
+                <a:alpha val="12000"/>
+              </a:srgbClr>
+            </a:outerShdw>
+          </a:effectLst>
+        </p:spPr>
+      </p:sp>
+      <p:sp>
+        <p:nvSpPr>
+          <p:cNvPr id="12" name="Shape 10"/>
+          <p:cNvSpPr/>
+          <p:nvPr/>
+        </p:nvSpPr>
+        <p:spPr>
+          <a:xfrm>
+            <a:off x="457200" y="2423160"/>
+            <a:ext cx="64008" cy="1051560"/>
+          </a:xfrm>
+          <a:prstGeom prst="rect">
+            <a:avLst/>
+          </a:prstGeom>
+          <a:solidFill>
+            <a:srgbClr val="C8372D"/>
+          </a:solidFill>
+          <a:ln/>
+        </p:spPr>
+      </p:sp>
+      <p:sp>
+        <p:nvSpPr>
+          <p:cNvPr id="13" name="Text 11"/>
+          <p:cNvSpPr/>
+          <p:nvPr/>
+        </p:nvSpPr>
+        <p:spPr>
+          <a:xfrm>
+            <a:off x="640080" y="2514600"/>
+            <a:ext cx="457200" cy="457200"/>
+          </a:xfrm>
+          <a:prstGeom prst="rect">
+            <a:avLst/>
+          </a:prstGeom>
+          <a:noFill/>
+          <a:ln/>
+        </p:spPr>
+        <p:txBody>
+          <a:bodyPr wrap="square" rtlCol="0" anchor="ctr"/>
+          <a:lstStyle/>
+          <a:p>
+            <a:pPr algn="ctr" indent="0" marL="0">
+              <a:buNone/>
+            </a:pPr>
+            <a:r>
+              <a:rPr lang="en-US" sz="2000" dirty="0">
+                <a:solidFill>
+                  <a:srgbClr val="C8372D"/>
+                </a:solidFill>
+                <a:latin typeface="Calibri" pitchFamily="34" charset="0"/>
+                <a:ea typeface="Calibri" pitchFamily="34" charset="-122"/>
+                <a:cs typeface="Calibri" pitchFamily="34" charset="-120"/>
+              </a:rPr>
+              <a:t>▶</a:t>
+            </a:r>
+            <a:endParaRPr lang="en-US" sz="2000" dirty="0"/>
+          </a:p>
+        </p:txBody>
+      </p:sp>
+      <p:sp>
+        <p:nvSpPr>
+          <p:cNvPr id="14" name="Text 12"/>
+          <p:cNvSpPr/>
+          <p:nvPr/>
+        </p:nvSpPr>
+        <p:spPr>
+          <a:xfrm>
+            <a:off x="1188720" y="2496312"/>
+            <a:ext cx="7132320" cy="411480"/>
+          </a:xfrm>
+          <a:prstGeom prst="rect">
+            <a:avLst/>
+          </a:prstGeom>
+          <a:noFill/>
+          <a:ln/>
+        </p:spPr>
+        <p:txBody>
+          <a:bodyPr wrap="square" rtlCol="0" anchor="ctr"/>
+          <a:lstStyle/>
+          <a:p>
+            <a:pPr indent="0" marL="0">
+              <a:buNone/>
+            </a:pPr>
+            <a:r>
+              <a:rPr lang="en-US" sz="1400" b="1" dirty="0">
+                <a:solidFill>
+                  <a:srgbClr val="1B2A4A"/>
+                </a:solidFill>
+                <a:latin typeface="Calibri" pitchFamily="34" charset="0"/>
+                <a:ea typeface="Calibri" pitchFamily="34" charset="-122"/>
+                <a:cs typeface="Calibri" pitchFamily="34" charset="-120"/>
+              </a:rPr>
+              <a:t>Substitution — The Basics</a:t>
+            </a:r>
+            <a:endParaRPr lang="en-US" sz="1400" dirty="0"/>
+          </a:p>
+        </p:txBody>
+      </p:sp>
+      <p:sp>
+        <p:nvSpPr>
+          <p:cNvPr id="15" name="Text 13"/>
+          <p:cNvSpPr/>
+          <p:nvPr/>
+        </p:nvSpPr>
+        <p:spPr>
+          <a:xfrm>
+            <a:off x="1188720" y="2880360"/>
+            <a:ext cx="7132320" cy="320040"/>
+          </a:xfrm>
+          <a:prstGeom prst="rect">
+            <a:avLst/>
+          </a:prstGeom>
+          <a:noFill/>
+          <a:ln/>
+        </p:spPr>
+        <p:txBody>
+          <a:bodyPr wrap="square" rtlCol="0" anchor="ctr"/>
+          <a:lstStyle/>
+          <a:p>
+            <a:pPr indent="0" marL="0">
+              <a:buNone/>
+            </a:pPr>
+            <a:r>
+              <a:rPr lang="en-US" sz="1100" dirty="0">
+                <a:solidFill>
+                  <a:srgbClr val="6B6660"/>
+                </a:solidFill>
+                <a:latin typeface="Calibri" pitchFamily="34" charset="0"/>
+                <a:ea typeface="Calibri" pitchFamily="34" charset="-122"/>
+                <a:cs typeface="Calibri" pitchFamily="34" charset="-120"/>
+              </a:rPr>
+              <a:t>Cognito  •  4 min</a:t>
+            </a:r>
+            <a:endParaRPr lang="en-US" sz="1100" dirty="0"/>
+          </a:p>
+        </p:txBody>
+      </p:sp>
+      <p:sp>
+        <p:nvSpPr>
+          <p:cNvPr id="16" name="Shape 14"/>
+          <p:cNvSpPr/>
+          <p:nvPr/>
+        </p:nvSpPr>
+        <p:spPr>
+          <a:xfrm>
+            <a:off x="457200" y="3611880"/>
+            <a:ext cx="8229600" cy="1051560"/>
+          </a:xfrm>
+          <a:prstGeom prst="rect">
+            <a:avLst/>
+          </a:prstGeom>
+          <a:solidFill>
+            <a:srgbClr val="FFFFFF"/>
+          </a:solidFill>
+          <a:ln/>
+          <a:effectLst>
+            <a:outerShdw sx="100000" sy="100000" kx="0" ky="0" algn="bl" rotWithShape="0" blurRad="76200" dist="25400" dir="8100000">
+              <a:srgbClr val="000000">
+                <a:alpha val="12000"/>
+              </a:srgbClr>
+            </a:outerShdw>
+          </a:effectLst>
+        </p:spPr>
+      </p:sp>
+      <p:sp>
+        <p:nvSpPr>
+          <p:cNvPr id="17" name="Shape 15"/>
+          <p:cNvSpPr/>
+          <p:nvPr/>
+        </p:nvSpPr>
+        <p:spPr>
+          <a:xfrm>
+            <a:off x="457200" y="3611880"/>
+            <a:ext cx="64008" cy="1051560"/>
+          </a:xfrm>
+          <a:prstGeom prst="rect">
+            <a:avLst/>
+          </a:prstGeom>
+          <a:solidFill>
+            <a:srgbClr val="C8372D"/>
+          </a:solidFill>
+          <a:ln/>
+        </p:spPr>
+      </p:sp>
+      <p:sp>
+        <p:nvSpPr>
+          <p:cNvPr id="18" name="Text 16"/>
+          <p:cNvSpPr/>
+          <p:nvPr/>
+        </p:nvSpPr>
+        <p:spPr>
+          <a:xfrm>
+            <a:off x="640080" y="3703320"/>
+            <a:ext cx="457200" cy="457200"/>
+          </a:xfrm>
+          <a:prstGeom prst="rect">
+            <a:avLst/>
+          </a:prstGeom>
+          <a:noFill/>
+          <a:ln/>
+        </p:spPr>
+        <p:txBody>
+          <a:bodyPr wrap="square" rtlCol="0" anchor="ctr"/>
+          <a:lstStyle/>
+          <a:p>
+            <a:pPr algn="ctr" indent="0" marL="0">
+              <a:buNone/>
+            </a:pPr>
+            <a:r>
+              <a:rPr lang="en-US" sz="2000" dirty="0">
+                <a:solidFill>
+                  <a:srgbClr val="C8372D"/>
+                </a:solidFill>
+                <a:latin typeface="Calibri" pitchFamily="34" charset="0"/>
+                <a:ea typeface="Calibri" pitchFamily="34" charset="-122"/>
+                <a:cs typeface="Calibri" pitchFamily="34" charset="-120"/>
+              </a:rPr>
+              <a:t>▶</a:t>
+            </a:r>
+            <a:endParaRPr lang="en-US" sz="2000" dirty="0"/>
+          </a:p>
+        </p:txBody>
+      </p:sp>
+      <p:sp>
+        <p:nvSpPr>
+          <p:cNvPr id="19" name="Text 17"/>
+          <p:cNvSpPr/>
+          <p:nvPr/>
+        </p:nvSpPr>
+        <p:spPr>
+          <a:xfrm>
+            <a:off x="1188720" y="3685032"/>
+            <a:ext cx="7132320" cy="411480"/>
+          </a:xfrm>
+          <a:prstGeom prst="rect">
+            <a:avLst/>
+          </a:prstGeom>
+          <a:noFill/>
+          <a:ln/>
+        </p:spPr>
+        <p:txBody>
+          <a:bodyPr wrap="square" rtlCol="0" anchor="ctr"/>
+          <a:lstStyle/>
+          <a:p>
+            <a:pPr indent="0" marL="0">
+              <a:buNone/>
+            </a:pPr>
+            <a:r>
+              <a:rPr lang="en-US" sz="1400" b="1" dirty="0">
+                <a:solidFill>
+                  <a:srgbClr val="1B2A4A"/>
+                </a:solidFill>
+                <a:latin typeface="Calibri" pitchFamily="34" charset="0"/>
+                <a:ea typeface="Calibri" pitchFamily="34" charset="-122"/>
+                <a:cs typeface="Calibri" pitchFamily="34" charset="-120"/>
+              </a:rPr>
+              <a:t>Evaluating Expressions with Negative Numbers</a:t>
+            </a:r>
+            <a:endParaRPr lang="en-US" sz="1400" dirty="0"/>
+          </a:p>
+        </p:txBody>
+      </p:sp>
+      <p:sp>
+        <p:nvSpPr>
+          <p:cNvPr id="20" name="Text 18"/>
+          <p:cNvSpPr/>
+          <p:nvPr/>
+        </p:nvSpPr>
+        <p:spPr>
+          <a:xfrm>
+            <a:off x="1188720" y="4069080"/>
+            <a:ext cx="7132320" cy="320040"/>
+          </a:xfrm>
+          <a:prstGeom prst="rect">
+            <a:avLst/>
+          </a:prstGeom>
+          <a:noFill/>
+          <a:ln/>
+        </p:spPr>
+        <p:txBody>
+          <a:bodyPr wrap="square" rtlCol="0" anchor="ctr"/>
+          <a:lstStyle/>
+          <a:p>
+            <a:pPr indent="0" marL="0">
+              <a:buNone/>
+            </a:pPr>
+            <a:r>
+              <a:rPr lang="en-US" sz="1100" dirty="0">
+                <a:solidFill>
+                  <a:srgbClr val="6B6660"/>
+                </a:solidFill>
+                <a:latin typeface="Calibri" pitchFamily="34" charset="0"/>
+                <a:ea typeface="Calibri" pitchFamily="34" charset="-122"/>
+                <a:cs typeface="Calibri" pitchFamily="34" charset="-120"/>
+              </a:rPr>
+              <a:t>Math Antics  •  7 min</a:t>
+            </a:r>
+            <a:endParaRPr lang="en-US" sz="1100" dirty="0"/>
+          </a:p>
+        </p:txBody>
+      </p:sp>
+    </p:spTree>
+  </p:cSld>
+  <p:clrMapOvr>
+    <a:masterClrMapping/>
+  </p:clrMapOvr>
+</p:sld>
+</file>
+
+<file path=ppt/slides/slide8.xml><?xml version="1.0" encoding="utf-8"?>
+<p:sld xmlns:a="http://schemas.openxmlformats.org/drawingml/2006/main" xmlns:r="http://schemas.openxmlformats.org/officeDocument/2006/relationships" xmlns:p="http://schemas.openxmlformats.org/presentationml/2006/main">
+  <p:cSld name="Slide 8">
+    <p:spTree>
+      <p:nvGrpSpPr>
+        <p:cNvPr id="1" name=""/>
+        <p:cNvGrpSpPr/>
+        <p:nvPr/>
+      </p:nvGrpSpPr>
+      <p:grpSpPr>
+        <a:xfrm>
+          <a:off x="0" y="0"/>
+          <a:ext cx="0" cy="0"/>
+          <a:chOff x="0" y="0"/>
+          <a:chExt cx="0" cy="0"/>
+        </a:xfrm>
+      </p:grpSpPr>
+      <p:sp>
+        <p:nvSpPr>
+          <p:cNvPr id="2" name="Shape 0"/>
+          <p:cNvSpPr/>
+          <p:nvPr/>
+        </p:nvSpPr>
+        <p:spPr>
+          <a:xfrm>
+            <a:off x="0" y="0"/>
+            <a:ext cx="9144000" cy="5143500"/>
+          </a:xfrm>
+          <a:prstGeom prst="rect">
+            <a:avLst/>
+          </a:prstGeom>
+          <a:solidFill>
+            <a:srgbClr val="1B2A4A"/>
+          </a:solidFill>
+          <a:ln/>
+        </p:spPr>
+      </p:sp>
+      <p:sp>
+        <p:nvSpPr>
+          <p:cNvPr id="3" name="Shape 1"/>
+          <p:cNvSpPr/>
+          <p:nvPr/>
+        </p:nvSpPr>
+        <p:spPr>
+          <a:xfrm>
+            <a:off x="0" y="4777740"/>
+            <a:ext cx="9144000" cy="365760"/>
+          </a:xfrm>
+          <a:prstGeom prst="rect">
+            <a:avLst/>
+          </a:prstGeom>
+          <a:solidFill>
+            <a:srgbClr val="C8372D"/>
+          </a:solidFill>
+          <a:ln/>
+        </p:spPr>
+      </p:sp>
+      <p:sp>
+        <p:nvSpPr>
+          <p:cNvPr id="4" name="Text 2"/>
+          <p:cNvSpPr/>
+          <p:nvPr/>
+        </p:nvSpPr>
+        <p:spPr>
+          <a:xfrm>
+            <a:off x="731520" y="1371600"/>
+            <a:ext cx="7680960" cy="914400"/>
+          </a:xfrm>
+          <a:prstGeom prst="rect">
+            <a:avLst/>
+          </a:prstGeom>
+          <a:noFill/>
+          <a:ln/>
+        </p:spPr>
+        <p:txBody>
+          <a:bodyPr wrap="square" rtlCol="0" anchor="ctr"/>
+          <a:lstStyle/>
+          <a:p>
+            <a:pPr algn="ctr" indent="0" marL="0">
+              <a:buNone/>
+            </a:pPr>
+            <a:r>
+              <a:rPr lang="en-US" sz="3600" b="1" dirty="0">
+                <a:solidFill>
+                  <a:srgbClr val="FFFFFF"/>
+                </a:solidFill>
+                <a:latin typeface="Georgia" pitchFamily="34" charset="0"/>
+                <a:ea typeface="Georgia" pitchFamily="34" charset="-122"/>
+                <a:cs typeface="Georgia" pitchFamily="34" charset="-120"/>
+              </a:rPr>
+              <a:t>Review &amp; Practise</a:t>
+            </a:r>
+            <a:endParaRPr lang="en-US" sz="3600" dirty="0"/>
+          </a:p>
+        </p:txBody>
+      </p:sp>
+      <p:sp>
+        <p:nvSpPr>
+          <p:cNvPr id="5" name="Text 3"/>
+          <p:cNvSpPr/>
+          <p:nvPr/>
+        </p:nvSpPr>
+        <p:spPr>
+          <a:xfrm>
+            <a:off x="731520" y="2560320"/>
+            <a:ext cx="7680960" cy="548640"/>
+          </a:xfrm>
+          <a:prstGeom prst="rect">
+            <a:avLst/>
+          </a:prstGeom>
+          <a:noFill/>
+          <a:ln/>
+        </p:spPr>
+        <p:txBody>
+          <a:bodyPr wrap="square" rtlCol="0" anchor="ctr"/>
+          <a:lstStyle/>
+          <a:p>
+            <a:pPr algn="ctr" indent="0" marL="0">
+              <a:buNone/>
+            </a:pPr>
+            <a:r>
+              <a:rPr lang="en-US" sz="2000" dirty="0">
+                <a:solidFill>
+                  <a:srgbClr val="C8372D"/>
+                </a:solidFill>
+                <a:latin typeface="Calibri" pitchFamily="34" charset="0"/>
+                <a:ea typeface="Calibri" pitchFamily="34" charset="-122"/>
+                <a:cs typeface="Calibri" pitchFamily="34" charset="-120"/>
+              </a:rPr>
               <a:t>mrzocchi.com</a:t>
             </a:r>
-            <a:endParaRPr lang="en-US" sz="1400" dirty="0"/>
+            <a:endParaRPr lang="en-US" sz="2000" dirty="0"/>
           </a:p>
         </p:txBody>
       </p:sp>
